--- a/snowflake/Snowflake.pptx
+++ b/snowflake/Snowflake.pptx
@@ -6,11 +6,23 @@
   </p:sldMasterIdLst>
   <p:sldIdLst>
     <p:sldId id="256" r:id="rId2"/>
-    <p:sldId id="257" r:id="rId3"/>
-    <p:sldId id="258" r:id="rId4"/>
-    <p:sldId id="260" r:id="rId5"/>
-    <p:sldId id="261" r:id="rId6"/>
-    <p:sldId id="262" r:id="rId7"/>
+    <p:sldId id="263" r:id="rId3"/>
+    <p:sldId id="264" r:id="rId4"/>
+    <p:sldId id="265" r:id="rId5"/>
+    <p:sldId id="266" r:id="rId6"/>
+    <p:sldId id="267" r:id="rId7"/>
+    <p:sldId id="268" r:id="rId8"/>
+    <p:sldId id="269" r:id="rId9"/>
+    <p:sldId id="272" r:id="rId10"/>
+    <p:sldId id="270" r:id="rId11"/>
+    <p:sldId id="271" r:id="rId12"/>
+    <p:sldId id="273" r:id="rId13"/>
+    <p:sldId id="274" r:id="rId14"/>
+    <p:sldId id="257" r:id="rId15"/>
+    <p:sldId id="258" r:id="rId16"/>
+    <p:sldId id="260" r:id="rId17"/>
+    <p:sldId id="261" r:id="rId18"/>
+    <p:sldId id="262" r:id="rId19"/>
   </p:sldIdLst>
   <p:sldSz cx="12192000" cy="6858000"/>
   <p:notesSz cx="6858000" cy="9144000"/>
@@ -1031,13 +1043,13 @@
       <dgm:prSet presAssocID="{57923C1A-FF59-4300-9997-9B5EFFCD9BFC}" presName="iconRect" presStyleLbl="node1" presStyleIdx="0" presStyleCnt="3"/>
       <dgm:spPr>
         <a:blipFill>
-          <a:blip xmlns:r="http://schemas.openxmlformats.org/officeDocument/2006/relationships" r:embed="rId1">
+          <a:blip xmlns:r="http://schemas.openxmlformats.org/officeDocument/2006/relationships">
             <a:extLst>
               <a:ext uri="{28A0092B-C50C-407E-A947-70E740481C1C}">
                 <a14:useLocalDpi xmlns:a14="http://schemas.microsoft.com/office/drawing/2010/main" val="0"/>
               </a:ext>
               <a:ext uri="{96DAC541-7B7A-43D3-8B79-37D633B846F1}">
-                <asvg:svgBlip xmlns:asvg="http://schemas.microsoft.com/office/drawing/2016/SVG/main" r:embed="rId2"/>
+                <asvg:svgBlip xmlns:asvg="http://schemas.microsoft.com/office/drawing/2016/SVG/main" r:embed="rId1"/>
               </a:ext>
             </a:extLst>
           </a:blip>
@@ -1081,13 +1093,13 @@
       <dgm:prSet presAssocID="{EA2DB709-2347-445B-9848-85D77F670862}" presName="iconRect" presStyleLbl="node1" presStyleIdx="1" presStyleCnt="3"/>
       <dgm:spPr>
         <a:blipFill>
-          <a:blip xmlns:r="http://schemas.openxmlformats.org/officeDocument/2006/relationships" r:embed="rId3">
+          <a:blip xmlns:r="http://schemas.openxmlformats.org/officeDocument/2006/relationships">
             <a:extLst>
               <a:ext uri="{28A0092B-C50C-407E-A947-70E740481C1C}">
                 <a14:useLocalDpi xmlns:a14="http://schemas.microsoft.com/office/drawing/2010/main" val="0"/>
               </a:ext>
               <a:ext uri="{96DAC541-7B7A-43D3-8B79-37D633B846F1}">
-                <asvg:svgBlip xmlns:asvg="http://schemas.microsoft.com/office/drawing/2016/SVG/main" r:embed="rId4"/>
+                <asvg:svgBlip xmlns:asvg="http://schemas.microsoft.com/office/drawing/2016/SVG/main" r:embed="rId2"/>
               </a:ext>
             </a:extLst>
           </a:blip>
@@ -1131,13 +1143,13 @@
       <dgm:prSet presAssocID="{0A104462-619F-4DC7-BFF1-9C9A22513BB5}" presName="iconRect" presStyleLbl="node1" presStyleIdx="2" presStyleCnt="3"/>
       <dgm:spPr>
         <a:blipFill>
-          <a:blip xmlns:r="http://schemas.openxmlformats.org/officeDocument/2006/relationships" r:embed="rId5">
+          <a:blip xmlns:r="http://schemas.openxmlformats.org/officeDocument/2006/relationships">
             <a:extLst>
               <a:ext uri="{28A0092B-C50C-407E-A947-70E740481C1C}">
                 <a14:useLocalDpi xmlns:a14="http://schemas.microsoft.com/office/drawing/2010/main" val="0"/>
               </a:ext>
               <a:ext uri="{96DAC541-7B7A-43D3-8B79-37D633B846F1}">
-                <asvg:svgBlip xmlns:asvg="http://schemas.microsoft.com/office/drawing/2016/SVG/main" r:embed="rId6"/>
+                <asvg:svgBlip xmlns:asvg="http://schemas.microsoft.com/office/drawing/2016/SVG/main" r:embed="rId3"/>
               </a:ext>
             </a:extLst>
           </a:blip>
@@ -1266,13 +1278,13 @@
           <a:avLst/>
         </a:prstGeom>
         <a:blipFill>
-          <a:blip xmlns:r="http://schemas.openxmlformats.org/officeDocument/2006/relationships" r:embed="rId1">
+          <a:blip xmlns:r="http://schemas.openxmlformats.org/officeDocument/2006/relationships">
             <a:extLst>
               <a:ext uri="{28A0092B-C50C-407E-A947-70E740481C1C}">
                 <a14:useLocalDpi xmlns:a14="http://schemas.microsoft.com/office/drawing/2010/main" val="0"/>
               </a:ext>
               <a:ext uri="{96DAC541-7B7A-43D3-8B79-37D633B846F1}">
-                <asvg:svgBlip xmlns:asvg="http://schemas.microsoft.com/office/drawing/2016/SVG/main" r:embed="rId2"/>
+                <asvg:svgBlip xmlns:asvg="http://schemas.microsoft.com/office/drawing/2016/SVG/main" r:embed="rId1"/>
               </a:ext>
             </a:extLst>
           </a:blip>
@@ -1424,13 +1436,13 @@
           <a:avLst/>
         </a:prstGeom>
         <a:blipFill>
-          <a:blip xmlns:r="http://schemas.openxmlformats.org/officeDocument/2006/relationships" r:embed="rId3">
+          <a:blip xmlns:r="http://schemas.openxmlformats.org/officeDocument/2006/relationships">
             <a:extLst>
               <a:ext uri="{28A0092B-C50C-407E-A947-70E740481C1C}">
                 <a14:useLocalDpi xmlns:a14="http://schemas.microsoft.com/office/drawing/2010/main" val="0"/>
               </a:ext>
               <a:ext uri="{96DAC541-7B7A-43D3-8B79-37D633B846F1}">
-                <asvg:svgBlip xmlns:asvg="http://schemas.microsoft.com/office/drawing/2016/SVG/main" r:embed="rId4"/>
+                <asvg:svgBlip xmlns:asvg="http://schemas.microsoft.com/office/drawing/2016/SVG/main" r:embed="rId2"/>
               </a:ext>
             </a:extLst>
           </a:blip>
@@ -1582,13 +1594,13 @@
           <a:avLst/>
         </a:prstGeom>
         <a:blipFill>
-          <a:blip xmlns:r="http://schemas.openxmlformats.org/officeDocument/2006/relationships" r:embed="rId5">
+          <a:blip xmlns:r="http://schemas.openxmlformats.org/officeDocument/2006/relationships">
             <a:extLst>
               <a:ext uri="{28A0092B-C50C-407E-A947-70E740481C1C}">
                 <a14:useLocalDpi xmlns:a14="http://schemas.microsoft.com/office/drawing/2010/main" val="0"/>
               </a:ext>
               <a:ext uri="{96DAC541-7B7A-43D3-8B79-37D633B846F1}">
-                <asvg:svgBlip xmlns:asvg="http://schemas.microsoft.com/office/drawing/2016/SVG/main" r:embed="rId6"/>
+                <asvg:svgBlip xmlns:asvg="http://schemas.microsoft.com/office/drawing/2016/SVG/main" r:embed="rId3"/>
               </a:ext>
             </a:extLst>
           </a:blip>
@@ -3069,6 +3081,13 @@
             <a:schemeClr val="lt1"/>
           </a:fontRef>
         </p:style>
+        <p:txBody>
+          <a:bodyPr/>
+          <a:lstStyle/>
+          <a:p>
+            <a:endParaRPr lang="en-US"/>
+          </a:p>
+        </p:txBody>
       </p:sp>
       <p:sp>
         <p:nvSpPr>
@@ -3260,7 +3279,7 @@
             <a:fld id="{B61BEF0D-F0BB-DE4B-95CE-6DB70DBA9567}" type="datetimeFigureOut">
               <a:rPr lang="en-US" dirty="0"/>
               <a:pPr/>
-              <a:t>9/19/2025</a:t>
+              <a:t>7/7/2026</a:t>
             </a:fld>
             <a:endParaRPr lang="en-US" dirty="0"/>
           </a:p>
@@ -3522,7 +3541,7 @@
             <a:fld id="{B61BEF0D-F0BB-DE4B-95CE-6DB70DBA9567}" type="datetimeFigureOut">
               <a:rPr lang="en-US" dirty="0"/>
               <a:pPr/>
-              <a:t>9/19/2025</a:t>
+              <a:t>7/7/2026</a:t>
             </a:fld>
             <a:endParaRPr lang="en-US" dirty="0"/>
           </a:p>
@@ -3757,7 +3776,7 @@
             <a:fld id="{B61BEF0D-F0BB-DE4B-95CE-6DB70DBA9567}" type="datetimeFigureOut">
               <a:rPr lang="en-US" dirty="0"/>
               <a:pPr/>
-              <a:t>9/19/2025</a:t>
+              <a:t>7/7/2026</a:t>
             </a:fld>
             <a:endParaRPr lang="en-US" dirty="0"/>
           </a:p>
@@ -3895,6 +3914,13 @@
             <a:schemeClr val="lt1"/>
           </a:fontRef>
         </p:style>
+        <p:txBody>
+          <a:bodyPr/>
+          <a:lstStyle/>
+          <a:p>
+            <a:endParaRPr lang="en-US"/>
+          </a:p>
+        </p:txBody>
       </p:sp>
       <p:sp>
         <p:nvSpPr>
@@ -3997,7 +4023,7 @@
             <a:fld id="{B61BEF0D-F0BB-DE4B-95CE-6DB70DBA9567}" type="datetimeFigureOut">
               <a:rPr lang="en-US" dirty="0"/>
               <a:pPr/>
-              <a:t>9/19/2025</a:t>
+              <a:t>7/7/2026</a:t>
             </a:fld>
             <a:endParaRPr lang="en-US" dirty="0"/>
           </a:p>
@@ -4305,7 +4331,7 @@
             <a:fld id="{B61BEF0D-F0BB-DE4B-95CE-6DB70DBA9567}" type="datetimeFigureOut">
               <a:rPr lang="en-US" dirty="0"/>
               <a:pPr/>
-              <a:t>9/19/2025</a:t>
+              <a:t>7/7/2026</a:t>
             </a:fld>
             <a:endParaRPr lang="en-US" dirty="0"/>
           </a:p>
@@ -4606,7 +4632,7 @@
             <a:fld id="{B61BEF0D-F0BB-DE4B-95CE-6DB70DBA9567}" type="datetimeFigureOut">
               <a:rPr lang="en-US" dirty="0"/>
               <a:pPr/>
-              <a:t>9/19/2025</a:t>
+              <a:t>7/7/2026</a:t>
             </a:fld>
             <a:endParaRPr lang="en-US" dirty="0"/>
           </a:p>
@@ -5027,7 +5053,7 @@
             <a:fld id="{B61BEF0D-F0BB-DE4B-95CE-6DB70DBA9567}" type="datetimeFigureOut">
               <a:rPr lang="en-US" dirty="0"/>
               <a:pPr/>
-              <a:t>9/19/2025</a:t>
+              <a:t>7/7/2026</a:t>
             </a:fld>
             <a:endParaRPr lang="en-US" dirty="0"/>
           </a:p>
@@ -5190,7 +5216,7 @@
             <a:fld id="{B61BEF0D-F0BB-DE4B-95CE-6DB70DBA9567}" type="datetimeFigureOut">
               <a:rPr lang="en-US" dirty="0"/>
               <a:pPr/>
-              <a:t>9/19/2025</a:t>
+              <a:t>7/7/2026</a:t>
             </a:fld>
             <a:endParaRPr lang="en-US" dirty="0"/>
           </a:p>
@@ -5287,7 +5313,7 @@
             <a:fld id="{B61BEF0D-F0BB-DE4B-95CE-6DB70DBA9567}" type="datetimeFigureOut">
               <a:rPr lang="en-US" dirty="0"/>
               <a:pPr/>
-              <a:t>9/19/2025</a:t>
+              <a:t>7/7/2026</a:t>
             </a:fld>
             <a:endParaRPr lang="en-US" dirty="0"/>
           </a:p>
@@ -5665,7 +5691,7 @@
             <a:fld id="{B61BEF0D-F0BB-DE4B-95CE-6DB70DBA9567}" type="datetimeFigureOut">
               <a:rPr lang="en-US" dirty="0"/>
               <a:pPr/>
-              <a:t>9/19/2025</a:t>
+              <a:t>7/7/2026</a:t>
             </a:fld>
             <a:endParaRPr lang="en-US" dirty="0"/>
           </a:p>
@@ -5951,7 +5977,7 @@
             <a:fld id="{B61BEF0D-F0BB-DE4B-95CE-6DB70DBA9567}" type="datetimeFigureOut">
               <a:rPr lang="en-US" dirty="0"/>
               <a:pPr/>
-              <a:t>9/19/2025</a:t>
+              <a:t>7/7/2026</a:t>
             </a:fld>
             <a:endParaRPr lang="en-US" dirty="0"/>
           </a:p>
@@ -6190,7 +6216,7 @@
             <a:fld id="{B61BEF0D-F0BB-DE4B-95CE-6DB70DBA9567}" type="datetimeFigureOut">
               <a:rPr lang="en-US" dirty="0"/>
               <a:pPr/>
-              <a:t>9/19/2025</a:t>
+              <a:t>7/7/2026</a:t>
             </a:fld>
             <a:endParaRPr lang="en-US" dirty="0"/>
           </a:p>
@@ -6307,6 +6333,13 @@
             <a:schemeClr val="lt1"/>
           </a:fontRef>
         </p:style>
+        <p:txBody>
+          <a:bodyPr/>
+          <a:lstStyle/>
+          <a:p>
+            <a:endParaRPr lang="en-US"/>
+          </a:p>
+        </p:txBody>
       </p:sp>
       <p:sp>
         <p:nvSpPr>
@@ -6344,6 +6377,13 @@
             <a:schemeClr val="lt1"/>
           </a:fontRef>
         </p:style>
+        <p:txBody>
+          <a:bodyPr/>
+          <a:lstStyle/>
+          <a:p>
+            <a:endParaRPr lang="en-US"/>
+          </a:p>
+        </p:txBody>
       </p:sp>
       <p:sp>
         <p:nvSpPr>
@@ -6381,6 +6421,13 @@
             <a:schemeClr val="lt1"/>
           </a:fontRef>
         </p:style>
+        <p:txBody>
+          <a:bodyPr/>
+          <a:lstStyle/>
+          <a:p>
+            <a:endParaRPr lang="en-US"/>
+          </a:p>
+        </p:txBody>
       </p:sp>
     </p:spTree>
     <p:extLst>
@@ -6809,7 +6856,7 @@
           <a:p>
             <a:r>
               <a:rPr lang="en-US" dirty="0"/>
-              <a:t>Welcome To Training</a:t>
+              <a:t>Snowflake</a:t>
             </a:r>
           </a:p>
         </p:txBody>
@@ -6829,10 +6876,7 @@
           <a:bodyPr/>
           <a:lstStyle/>
           <a:p>
-            <a:r>
-              <a:rPr lang="en-US" dirty="0"/>
-              <a:t>An Introduction</a:t>
-            </a:r>
+            <a:endParaRPr lang="en-US" dirty="0"/>
           </a:p>
         </p:txBody>
       </p:sp>
@@ -6849,8 +6893,488 @@
 </p:sld>
 </file>
 
-<file path=ppt/slides/slide2.xml><?xml version="1.0" encoding="utf-8"?>
+<file path=ppt/slides/slide10.xml><?xml version="1.0" encoding="utf-8"?>
 <p:sld xmlns:a="http://schemas.openxmlformats.org/drawingml/2006/main" xmlns:r="http://schemas.openxmlformats.org/officeDocument/2006/relationships" xmlns:p="http://schemas.openxmlformats.org/presentationml/2006/main">
+  <p:cSld>
+    <p:spTree>
+      <p:nvGrpSpPr>
+        <p:cNvPr id="1" name=""/>
+        <p:cNvGrpSpPr/>
+        <p:nvPr/>
+      </p:nvGrpSpPr>
+      <p:grpSpPr>
+        <a:xfrm>
+          <a:off x="0" y="0"/>
+          <a:ext cx="0" cy="0"/>
+          <a:chOff x="0" y="0"/>
+          <a:chExt cx="0" cy="0"/>
+        </a:xfrm>
+      </p:grpSpPr>
+      <p:sp>
+        <p:nvSpPr>
+          <p:cNvPr id="2" name="Title 1">
+            <a:extLst>
+              <a:ext uri="{FF2B5EF4-FFF2-40B4-BE49-F238E27FC236}">
+                <a16:creationId xmlns:a16="http://schemas.microsoft.com/office/drawing/2014/main" id="{59342ABA-4BA8-E5B2-BE81-4982F55000DD}"/>
+              </a:ext>
+            </a:extLst>
+          </p:cNvPr>
+          <p:cNvSpPr>
+            <a:spLocks noGrp="1"/>
+          </p:cNvSpPr>
+          <p:nvPr>
+            <p:ph type="title"/>
+          </p:nvPr>
+        </p:nvSpPr>
+        <p:spPr/>
+        <p:txBody>
+          <a:bodyPr/>
+          <a:lstStyle/>
+          <a:p>
+            <a:r>
+              <a:rPr lang="en-US" dirty="0"/>
+              <a:t>What is snowflake?</a:t>
+            </a:r>
+          </a:p>
+        </p:txBody>
+      </p:sp>
+      <p:sp>
+        <p:nvSpPr>
+          <p:cNvPr id="3" name="Content Placeholder 2">
+            <a:extLst>
+              <a:ext uri="{FF2B5EF4-FFF2-40B4-BE49-F238E27FC236}">
+                <a16:creationId xmlns:a16="http://schemas.microsoft.com/office/drawing/2014/main" id="{BBB8B899-0EC2-0956-B703-1A61283498A8}"/>
+              </a:ext>
+            </a:extLst>
+          </p:cNvPr>
+          <p:cNvSpPr>
+            <a:spLocks noGrp="1"/>
+          </p:cNvSpPr>
+          <p:nvPr>
+            <p:ph idx="1"/>
+          </p:nvPr>
+        </p:nvSpPr>
+        <p:spPr/>
+        <p:txBody>
+          <a:bodyPr/>
+          <a:lstStyle/>
+          <a:p>
+            <a:r>
+              <a:rPr lang="en-US" dirty="0"/>
+              <a:t>A cloud native, data platform, that is a SaaS</a:t>
+            </a:r>
+          </a:p>
+          <a:p>
+            <a:pPr lvl="1"/>
+            <a:r>
+              <a:rPr lang="en-US" dirty="0"/>
+              <a:t>Cloud Native: under the hood it runs: AWS (native), Azure (2018), Google (2020)</a:t>
+            </a:r>
+          </a:p>
+          <a:p>
+            <a:pPr lvl="1"/>
+            <a:r>
+              <a:rPr lang="en-US" dirty="0"/>
+              <a:t>Data Platform</a:t>
+            </a:r>
+          </a:p>
+          <a:p>
+            <a:pPr lvl="2"/>
+            <a:r>
+              <a:rPr lang="en-US" dirty="0"/>
+              <a:t>data lake + data warehouse = </a:t>
+            </a:r>
+            <a:r>
+              <a:rPr lang="en-US" dirty="0" err="1"/>
+              <a:t>lakehouse</a:t>
+            </a:r>
+            <a:r>
+              <a:rPr lang="en-US" dirty="0"/>
+              <a:t> approach; snowflake is more than that</a:t>
+            </a:r>
+          </a:p>
+          <a:p>
+            <a:pPr lvl="2"/>
+            <a:r>
+              <a:rPr lang="en-US" dirty="0"/>
+              <a:t>Integrated AI and ML capabilities</a:t>
+            </a:r>
+          </a:p>
+          <a:p>
+            <a:pPr lvl="2"/>
+            <a:r>
+              <a:rPr lang="en-US" dirty="0"/>
+              <a:t>Supports ingestion, transformation, orchestration, streaming, and pipelines within the same platform, reducing the need for separate ETL infrastructure</a:t>
+            </a:r>
+          </a:p>
+          <a:p>
+            <a:pPr lvl="2"/>
+            <a:r>
+              <a:rPr lang="en-US" dirty="0"/>
+              <a:t>Governance and Security </a:t>
+            </a:r>
+          </a:p>
+          <a:p>
+            <a:pPr lvl="1"/>
+            <a:r>
+              <a:rPr lang="en-US" dirty="0"/>
+              <a:t>SaaS – software as a service; many things are managed for us;</a:t>
+            </a:r>
+          </a:p>
+          <a:p>
+            <a:pPr lvl="2"/>
+            <a:r>
+              <a:rPr lang="en-US" dirty="0"/>
+              <a:t>Pay as you go model</a:t>
+            </a:r>
+          </a:p>
+        </p:txBody>
+      </p:sp>
+    </p:spTree>
+    <p:extLst>
+      <p:ext uri="{BB962C8B-B14F-4D97-AF65-F5344CB8AC3E}">
+        <p14:creationId xmlns:p14="http://schemas.microsoft.com/office/powerpoint/2010/main" val="3204299702"/>
+      </p:ext>
+    </p:extLst>
+  </p:cSld>
+  <p:clrMapOvr>
+    <a:masterClrMapping/>
+  </p:clrMapOvr>
+</p:sld>
+</file>
+
+<file path=ppt/slides/slide11.xml><?xml version="1.0" encoding="utf-8"?>
+<p:sld xmlns:a="http://schemas.openxmlformats.org/drawingml/2006/main" xmlns:r="http://schemas.openxmlformats.org/officeDocument/2006/relationships" xmlns:p="http://schemas.openxmlformats.org/presentationml/2006/main">
+  <p:cSld>
+    <p:spTree>
+      <p:nvGrpSpPr>
+        <p:cNvPr id="1" name=""/>
+        <p:cNvGrpSpPr/>
+        <p:nvPr/>
+      </p:nvGrpSpPr>
+      <p:grpSpPr>
+        <a:xfrm>
+          <a:off x="0" y="0"/>
+          <a:ext cx="0" cy="0"/>
+          <a:chOff x="0" y="0"/>
+          <a:chExt cx="0" cy="0"/>
+        </a:xfrm>
+      </p:grpSpPr>
+      <p:sp>
+        <p:nvSpPr>
+          <p:cNvPr id="2" name="Title 1">
+            <a:extLst>
+              <a:ext uri="{FF2B5EF4-FFF2-40B4-BE49-F238E27FC236}">
+                <a16:creationId xmlns:a16="http://schemas.microsoft.com/office/drawing/2014/main" id="{0E891639-5A53-831E-D65F-C1909847D2F9}"/>
+              </a:ext>
+            </a:extLst>
+          </p:cNvPr>
+          <p:cNvSpPr>
+            <a:spLocks noGrp="1"/>
+          </p:cNvSpPr>
+          <p:nvPr>
+            <p:ph type="title"/>
+          </p:nvPr>
+        </p:nvSpPr>
+        <p:spPr/>
+        <p:txBody>
+          <a:bodyPr/>
+          <a:lstStyle/>
+          <a:p>
+            <a:r>
+              <a:rPr lang="en-US" dirty="0"/>
+              <a:t>Distributed Architectures</a:t>
+            </a:r>
+          </a:p>
+        </p:txBody>
+      </p:sp>
+      <p:sp>
+        <p:nvSpPr>
+          <p:cNvPr id="3" name="Content Placeholder 2">
+            <a:extLst>
+              <a:ext uri="{FF2B5EF4-FFF2-40B4-BE49-F238E27FC236}">
+                <a16:creationId xmlns:a16="http://schemas.microsoft.com/office/drawing/2014/main" id="{30E81EF9-EC3A-4C93-5BBE-13F81CC08A36}"/>
+              </a:ext>
+            </a:extLst>
+          </p:cNvPr>
+          <p:cNvSpPr>
+            <a:spLocks noGrp="1"/>
+          </p:cNvSpPr>
+          <p:nvPr>
+            <p:ph idx="1"/>
+          </p:nvPr>
+        </p:nvSpPr>
+        <p:spPr>
+          <a:xfrm>
+            <a:off x="581192" y="2180497"/>
+            <a:ext cx="11029615" cy="1248504"/>
+          </a:xfrm>
+        </p:spPr>
+        <p:txBody>
+          <a:bodyPr/>
+          <a:lstStyle/>
+          <a:p>
+            <a:r>
+              <a:rPr lang="en-US" dirty="0"/>
+              <a:t>Shared Disk – not scalable due to throughput</a:t>
+            </a:r>
+          </a:p>
+          <a:p>
+            <a:r>
+              <a:rPr lang="en-US" dirty="0"/>
+              <a:t>Shared Nothing – has throughput, but joins aren’t scalable</a:t>
+            </a:r>
+          </a:p>
+        </p:txBody>
+      </p:sp>
+      <p:pic>
+        <p:nvPicPr>
+          <p:cNvPr id="5" name="Picture 4">
+            <a:extLst>
+              <a:ext uri="{FF2B5EF4-FFF2-40B4-BE49-F238E27FC236}">
+                <a16:creationId xmlns:a16="http://schemas.microsoft.com/office/drawing/2014/main" id="{1770A41D-3641-7F5A-AB27-19A08157230A}"/>
+              </a:ext>
+            </a:extLst>
+          </p:cNvPr>
+          <p:cNvPicPr>
+            <a:picLocks noChangeAspect="1"/>
+          </p:cNvPicPr>
+          <p:nvPr/>
+        </p:nvPicPr>
+        <p:blipFill>
+          <a:blip r:embed="rId2"/>
+          <a:stretch>
+            <a:fillRect/>
+          </a:stretch>
+        </p:blipFill>
+        <p:spPr>
+          <a:xfrm>
+            <a:off x="1521423" y="3877037"/>
+            <a:ext cx="4243282" cy="2240211"/>
+          </a:xfrm>
+          <a:prstGeom prst="rect">
+            <a:avLst/>
+          </a:prstGeom>
+        </p:spPr>
+      </p:pic>
+      <p:pic>
+        <p:nvPicPr>
+          <p:cNvPr id="7" name="Picture 6">
+            <a:extLst>
+              <a:ext uri="{FF2B5EF4-FFF2-40B4-BE49-F238E27FC236}">
+                <a16:creationId xmlns:a16="http://schemas.microsoft.com/office/drawing/2014/main" id="{8AFF36A6-1625-8932-EA13-D6F3F6FAF321}"/>
+              </a:ext>
+            </a:extLst>
+          </p:cNvPr>
+          <p:cNvPicPr>
+            <a:picLocks noChangeAspect="1"/>
+          </p:cNvPicPr>
+          <p:nvPr/>
+        </p:nvPicPr>
+        <p:blipFill>
+          <a:blip r:embed="rId3"/>
+          <a:stretch>
+            <a:fillRect/>
+          </a:stretch>
+        </p:blipFill>
+        <p:spPr>
+          <a:xfrm>
+            <a:off x="6887688" y="3040168"/>
+            <a:ext cx="3370864" cy="3473478"/>
+          </a:xfrm>
+          <a:prstGeom prst="rect">
+            <a:avLst/>
+          </a:prstGeom>
+        </p:spPr>
+      </p:pic>
+    </p:spTree>
+    <p:extLst>
+      <p:ext uri="{BB962C8B-B14F-4D97-AF65-F5344CB8AC3E}">
+        <p14:creationId xmlns:p14="http://schemas.microsoft.com/office/powerpoint/2010/main" val="901567240"/>
+      </p:ext>
+    </p:extLst>
+  </p:cSld>
+  <p:clrMapOvr>
+    <a:masterClrMapping/>
+  </p:clrMapOvr>
+</p:sld>
+</file>
+
+<file path=ppt/slides/slide12.xml><?xml version="1.0" encoding="utf-8"?>
+<p:sld xmlns:a="http://schemas.openxmlformats.org/drawingml/2006/main" xmlns:r="http://schemas.openxmlformats.org/officeDocument/2006/relationships" xmlns:p="http://schemas.openxmlformats.org/presentationml/2006/main">
+  <p:cSld>
+    <p:spTree>
+      <p:nvGrpSpPr>
+        <p:cNvPr id="1" name=""/>
+        <p:cNvGrpSpPr/>
+        <p:nvPr/>
+      </p:nvGrpSpPr>
+      <p:grpSpPr>
+        <a:xfrm>
+          <a:off x="0" y="0"/>
+          <a:ext cx="0" cy="0"/>
+          <a:chOff x="0" y="0"/>
+          <a:chExt cx="0" cy="0"/>
+        </a:xfrm>
+      </p:grpSpPr>
+      <p:sp>
+        <p:nvSpPr>
+          <p:cNvPr id="2" name="Title 1">
+            <a:extLst>
+              <a:ext uri="{FF2B5EF4-FFF2-40B4-BE49-F238E27FC236}">
+                <a16:creationId xmlns:a16="http://schemas.microsoft.com/office/drawing/2014/main" id="{52B7138E-AA5B-18DD-2E4E-00D282A76DCF}"/>
+              </a:ext>
+            </a:extLst>
+          </p:cNvPr>
+          <p:cNvSpPr>
+            <a:spLocks noGrp="1"/>
+          </p:cNvSpPr>
+          <p:nvPr>
+            <p:ph type="title"/>
+          </p:nvPr>
+        </p:nvSpPr>
+        <p:spPr/>
+        <p:txBody>
+          <a:bodyPr/>
+          <a:lstStyle/>
+          <a:p>
+            <a:r>
+              <a:rPr lang="en-US" dirty="0"/>
+              <a:t>Multi-cluster shared data architecture</a:t>
+            </a:r>
+          </a:p>
+        </p:txBody>
+      </p:sp>
+      <p:pic>
+        <p:nvPicPr>
+          <p:cNvPr id="5" name="Content Placeholder 4">
+            <a:extLst>
+              <a:ext uri="{FF2B5EF4-FFF2-40B4-BE49-F238E27FC236}">
+                <a16:creationId xmlns:a16="http://schemas.microsoft.com/office/drawing/2014/main" id="{A439DB2A-F158-C553-8A42-954008BC40B0}"/>
+              </a:ext>
+            </a:extLst>
+          </p:cNvPr>
+          <p:cNvPicPr>
+            <a:picLocks noGrp="1" noChangeAspect="1"/>
+          </p:cNvPicPr>
+          <p:nvPr>
+            <p:ph idx="1"/>
+          </p:nvPr>
+        </p:nvPicPr>
+        <p:blipFill>
+          <a:blip r:embed="rId2"/>
+          <a:stretch>
+            <a:fillRect/>
+          </a:stretch>
+        </p:blipFill>
+        <p:spPr>
+          <a:xfrm>
+            <a:off x="2345618" y="1828800"/>
+            <a:ext cx="7500763" cy="5029200"/>
+          </a:xfrm>
+          <a:prstGeom prst="rect">
+            <a:avLst/>
+          </a:prstGeom>
+        </p:spPr>
+      </p:pic>
+    </p:spTree>
+    <p:extLst>
+      <p:ext uri="{BB962C8B-B14F-4D97-AF65-F5344CB8AC3E}">
+        <p14:creationId xmlns:p14="http://schemas.microsoft.com/office/powerpoint/2010/main" val="424617992"/>
+      </p:ext>
+    </p:extLst>
+  </p:cSld>
+  <p:clrMapOvr>
+    <a:masterClrMapping/>
+  </p:clrMapOvr>
+</p:sld>
+</file>
+
+<file path=ppt/slides/slide13.xml><?xml version="1.0" encoding="utf-8"?>
+<p:sld xmlns:a="http://schemas.openxmlformats.org/drawingml/2006/main" xmlns:r="http://schemas.openxmlformats.org/officeDocument/2006/relationships" xmlns:p="http://schemas.openxmlformats.org/presentationml/2006/main">
+  <p:cSld>
+    <p:spTree>
+      <p:nvGrpSpPr>
+        <p:cNvPr id="1" name=""/>
+        <p:cNvGrpSpPr/>
+        <p:nvPr/>
+      </p:nvGrpSpPr>
+      <p:grpSpPr>
+        <a:xfrm>
+          <a:off x="0" y="0"/>
+          <a:ext cx="0" cy="0"/>
+          <a:chOff x="0" y="0"/>
+          <a:chExt cx="0" cy="0"/>
+        </a:xfrm>
+      </p:grpSpPr>
+      <p:sp>
+        <p:nvSpPr>
+          <p:cNvPr id="2" name="Title 1">
+            <a:extLst>
+              <a:ext uri="{FF2B5EF4-FFF2-40B4-BE49-F238E27FC236}">
+                <a16:creationId xmlns:a16="http://schemas.microsoft.com/office/drawing/2014/main" id="{C475ADEE-3AAD-3BE8-C9BB-5D45C325FF6C}"/>
+              </a:ext>
+            </a:extLst>
+          </p:cNvPr>
+          <p:cNvSpPr>
+            <a:spLocks noGrp="1"/>
+          </p:cNvSpPr>
+          <p:nvPr>
+            <p:ph type="title"/>
+          </p:nvPr>
+        </p:nvSpPr>
+        <p:spPr/>
+        <p:txBody>
+          <a:bodyPr/>
+          <a:lstStyle/>
+          <a:p>
+            <a:r>
+              <a:rPr lang="en-US"/>
+              <a:t>Storage Layer</a:t>
+            </a:r>
+          </a:p>
+        </p:txBody>
+      </p:sp>
+      <p:sp>
+        <p:nvSpPr>
+          <p:cNvPr id="3" name="Content Placeholder 2">
+            <a:extLst>
+              <a:ext uri="{FF2B5EF4-FFF2-40B4-BE49-F238E27FC236}">
+                <a16:creationId xmlns:a16="http://schemas.microsoft.com/office/drawing/2014/main" id="{F4646BB9-0F69-C88C-909C-82F53999C176}"/>
+              </a:ext>
+            </a:extLst>
+          </p:cNvPr>
+          <p:cNvSpPr>
+            <a:spLocks noGrp="1"/>
+          </p:cNvSpPr>
+          <p:nvPr>
+            <p:ph idx="1"/>
+          </p:nvPr>
+        </p:nvSpPr>
+        <p:spPr/>
+        <p:txBody>
+          <a:bodyPr/>
+          <a:lstStyle/>
+          <a:p>
+            <a:endParaRPr lang="en-US"/>
+          </a:p>
+        </p:txBody>
+      </p:sp>
+    </p:spTree>
+    <p:extLst>
+      <p:ext uri="{BB962C8B-B14F-4D97-AF65-F5344CB8AC3E}">
+        <p14:creationId xmlns:p14="http://schemas.microsoft.com/office/powerpoint/2010/main" val="593893702"/>
+      </p:ext>
+    </p:extLst>
+  </p:cSld>
+  <p:clrMapOvr>
+    <a:masterClrMapping/>
+  </p:clrMapOvr>
+</p:sld>
+</file>
+
+<file path=ppt/slides/slide14.xml><?xml version="1.0" encoding="utf-8"?>
+<p:sld xmlns:a="http://schemas.openxmlformats.org/drawingml/2006/main" xmlns:r="http://schemas.openxmlformats.org/officeDocument/2006/relationships" xmlns:p="http://schemas.openxmlformats.org/presentationml/2006/main" show="0">
   <p:cSld>
     <p:spTree>
       <p:nvGrpSpPr>
@@ -6933,8 +7457,8 @@
 </p:sld>
 </file>
 
-<file path=ppt/slides/slide3.xml><?xml version="1.0" encoding="utf-8"?>
-<p:sld xmlns:a="http://schemas.openxmlformats.org/drawingml/2006/main" xmlns:r="http://schemas.openxmlformats.org/officeDocument/2006/relationships" xmlns:p="http://schemas.openxmlformats.org/presentationml/2006/main">
+<file path=ppt/slides/slide15.xml><?xml version="1.0" encoding="utf-8"?>
+<p:sld xmlns:a="http://schemas.openxmlformats.org/drawingml/2006/main" xmlns:r="http://schemas.openxmlformats.org/officeDocument/2006/relationships" xmlns:p="http://schemas.openxmlformats.org/presentationml/2006/main" show="0">
   <p:cSld>
     <p:spTree>
       <p:nvGrpSpPr>
@@ -7096,8 +7620,8 @@
 </p:sld>
 </file>
 
-<file path=ppt/slides/slide4.xml><?xml version="1.0" encoding="utf-8"?>
-<p:sld xmlns:a="http://schemas.openxmlformats.org/drawingml/2006/main" xmlns:r="http://schemas.openxmlformats.org/officeDocument/2006/relationships" xmlns:p="http://schemas.openxmlformats.org/presentationml/2006/main">
+<file path=ppt/slides/slide16.xml><?xml version="1.0" encoding="utf-8"?>
+<p:sld xmlns:a="http://schemas.openxmlformats.org/drawingml/2006/main" xmlns:r="http://schemas.openxmlformats.org/officeDocument/2006/relationships" xmlns:p="http://schemas.openxmlformats.org/presentationml/2006/main" show="0">
   <p:cSld>
     <p:bg>
       <p:bgPr>
@@ -7385,8 +7909,8 @@
 </p:sld>
 </file>
 
-<file path=ppt/slides/slide5.xml><?xml version="1.0" encoding="utf-8"?>
-<p:sld xmlns:a="http://schemas.openxmlformats.org/drawingml/2006/main" xmlns:r="http://schemas.openxmlformats.org/officeDocument/2006/relationships" xmlns:p="http://schemas.openxmlformats.org/presentationml/2006/main">
+<file path=ppt/slides/slide17.xml><?xml version="1.0" encoding="utf-8"?>
+<p:sld xmlns:a="http://schemas.openxmlformats.org/drawingml/2006/main" xmlns:r="http://schemas.openxmlformats.org/officeDocument/2006/relationships" xmlns:p="http://schemas.openxmlformats.org/presentationml/2006/main" show="0">
   <p:cSld>
     <p:spTree>
       <p:nvGrpSpPr>
@@ -7619,8 +8143,8 @@
 </p:sld>
 </file>
 
-<file path=ppt/slides/slide6.xml><?xml version="1.0" encoding="utf-8"?>
-<p:sld xmlns:a="http://schemas.openxmlformats.org/drawingml/2006/main" xmlns:r="http://schemas.openxmlformats.org/officeDocument/2006/relationships" xmlns:p="http://schemas.openxmlformats.org/presentationml/2006/main">
+<file path=ppt/slides/slide18.xml><?xml version="1.0" encoding="utf-8"?>
+<p:sld xmlns:a="http://schemas.openxmlformats.org/drawingml/2006/main" xmlns:r="http://schemas.openxmlformats.org/officeDocument/2006/relationships" xmlns:p="http://schemas.openxmlformats.org/presentationml/2006/main" show="0">
   <p:cSld>
     <p:spTree>
       <p:nvGrpSpPr>
@@ -8012,6 +8536,1892 @@
     <p:extLst>
       <p:ext uri="{BB962C8B-B14F-4D97-AF65-F5344CB8AC3E}">
         <p14:creationId xmlns:p14="http://schemas.microsoft.com/office/powerpoint/2010/main" val="3587871389"/>
+      </p:ext>
+    </p:extLst>
+  </p:cSld>
+  <p:clrMapOvr>
+    <a:masterClrMapping/>
+  </p:clrMapOvr>
+</p:sld>
+</file>
+
+<file path=ppt/slides/slide2.xml><?xml version="1.0" encoding="utf-8"?>
+<p:sld xmlns:a="http://schemas.openxmlformats.org/drawingml/2006/main" xmlns:r="http://schemas.openxmlformats.org/officeDocument/2006/relationships" xmlns:p="http://schemas.openxmlformats.org/presentationml/2006/main">
+  <p:cSld>
+    <p:spTree>
+      <p:nvGrpSpPr>
+        <p:cNvPr id="1" name=""/>
+        <p:cNvGrpSpPr/>
+        <p:nvPr/>
+      </p:nvGrpSpPr>
+      <p:grpSpPr>
+        <a:xfrm>
+          <a:off x="0" y="0"/>
+          <a:ext cx="0" cy="0"/>
+          <a:chOff x="0" y="0"/>
+          <a:chExt cx="0" cy="0"/>
+        </a:xfrm>
+      </p:grpSpPr>
+      <p:sp>
+        <p:nvSpPr>
+          <p:cNvPr id="2" name="Title 1">
+            <a:extLst>
+              <a:ext uri="{FF2B5EF4-FFF2-40B4-BE49-F238E27FC236}">
+                <a16:creationId xmlns:a16="http://schemas.microsoft.com/office/drawing/2014/main" id="{E05720D2-4A2C-FD9D-A6C9-83346468AB5E}"/>
+              </a:ext>
+            </a:extLst>
+          </p:cNvPr>
+          <p:cNvSpPr>
+            <a:spLocks noGrp="1"/>
+          </p:cNvSpPr>
+          <p:nvPr>
+            <p:ph type="title"/>
+          </p:nvPr>
+        </p:nvSpPr>
+        <p:spPr/>
+        <p:txBody>
+          <a:bodyPr/>
+          <a:lstStyle/>
+          <a:p>
+            <a:r>
+              <a:rPr lang="en-US" dirty="0"/>
+              <a:t>COF-co3</a:t>
+            </a:r>
+          </a:p>
+        </p:txBody>
+      </p:sp>
+      <p:pic>
+        <p:nvPicPr>
+          <p:cNvPr id="5" name="Content Placeholder 4">
+            <a:extLst>
+              <a:ext uri="{FF2B5EF4-FFF2-40B4-BE49-F238E27FC236}">
+                <a16:creationId xmlns:a16="http://schemas.microsoft.com/office/drawing/2014/main" id="{4DDB022B-D990-55D0-E122-3F1A4F4E35AD}"/>
+              </a:ext>
+            </a:extLst>
+          </p:cNvPr>
+          <p:cNvPicPr>
+            <a:picLocks noGrp="1" noChangeAspect="1"/>
+          </p:cNvPicPr>
+          <p:nvPr>
+            <p:ph idx="1"/>
+          </p:nvPr>
+        </p:nvPicPr>
+        <p:blipFill>
+          <a:blip r:embed="rId2"/>
+          <a:stretch>
+            <a:fillRect/>
+          </a:stretch>
+        </p:blipFill>
+        <p:spPr>
+          <a:xfrm>
+            <a:off x="580858" y="3194125"/>
+            <a:ext cx="11029950" cy="3101227"/>
+          </a:xfrm>
+          <a:prstGeom prst="rect">
+            <a:avLst/>
+          </a:prstGeom>
+        </p:spPr>
+      </p:pic>
+      <p:sp>
+        <p:nvSpPr>
+          <p:cNvPr id="6" name="TextBox 5">
+            <a:extLst>
+              <a:ext uri="{FF2B5EF4-FFF2-40B4-BE49-F238E27FC236}">
+                <a16:creationId xmlns:a16="http://schemas.microsoft.com/office/drawing/2014/main" id="{E02F3247-AF7F-D743-96E0-46B5A99A45D3}"/>
+              </a:ext>
+            </a:extLst>
+          </p:cNvPr>
+          <p:cNvSpPr txBox="1"/>
+          <p:nvPr/>
+        </p:nvSpPr>
+        <p:spPr>
+          <a:xfrm>
+            <a:off x="866899" y="2270374"/>
+            <a:ext cx="4523739" cy="369332"/>
+          </a:xfrm>
+          <a:prstGeom prst="rect">
+            <a:avLst/>
+          </a:prstGeom>
+          <a:noFill/>
+        </p:spPr>
+        <p:txBody>
+          <a:bodyPr wrap="none" rtlCol="0">
+            <a:spAutoFit/>
+          </a:bodyPr>
+          <a:lstStyle/>
+          <a:p>
+            <a:r>
+              <a:rPr lang="en-US" dirty="0"/>
+              <a:t>Access the study guide and get more info </a:t>
+            </a:r>
+            <a:r>
+              <a:rPr lang="en-US" dirty="0">
+                <a:hlinkClick r:id="rId3"/>
+              </a:rPr>
+              <a:t>here</a:t>
+            </a:r>
+            <a:endParaRPr lang="en-US" dirty="0"/>
+          </a:p>
+        </p:txBody>
+      </p:sp>
+    </p:spTree>
+    <p:extLst>
+      <p:ext uri="{BB962C8B-B14F-4D97-AF65-F5344CB8AC3E}">
+        <p14:creationId xmlns:p14="http://schemas.microsoft.com/office/powerpoint/2010/main" val="3488262277"/>
+      </p:ext>
+    </p:extLst>
+  </p:cSld>
+  <p:clrMapOvr>
+    <a:masterClrMapping/>
+  </p:clrMapOvr>
+</p:sld>
+</file>
+
+<file path=ppt/slides/slide3.xml><?xml version="1.0" encoding="utf-8"?>
+<p:sld xmlns:a="http://schemas.openxmlformats.org/drawingml/2006/main" xmlns:r="http://schemas.openxmlformats.org/officeDocument/2006/relationships" xmlns:p="http://schemas.openxmlformats.org/presentationml/2006/main">
+  <p:cSld>
+    <p:spTree>
+      <p:nvGrpSpPr>
+        <p:cNvPr id="1" name=""/>
+        <p:cNvGrpSpPr/>
+        <p:nvPr/>
+      </p:nvGrpSpPr>
+      <p:grpSpPr>
+        <a:xfrm>
+          <a:off x="0" y="0"/>
+          <a:ext cx="0" cy="0"/>
+          <a:chOff x="0" y="0"/>
+          <a:chExt cx="0" cy="0"/>
+        </a:xfrm>
+      </p:grpSpPr>
+      <p:sp>
+        <p:nvSpPr>
+          <p:cNvPr id="2" name="Title 1">
+            <a:extLst>
+              <a:ext uri="{FF2B5EF4-FFF2-40B4-BE49-F238E27FC236}">
+                <a16:creationId xmlns:a16="http://schemas.microsoft.com/office/drawing/2014/main" id="{ADCCC695-6CAB-6F7D-5C05-1BC48012B688}"/>
+              </a:ext>
+            </a:extLst>
+          </p:cNvPr>
+          <p:cNvSpPr>
+            <a:spLocks noGrp="1"/>
+          </p:cNvSpPr>
+          <p:nvPr>
+            <p:ph type="title"/>
+          </p:nvPr>
+        </p:nvSpPr>
+        <p:spPr/>
+        <p:txBody>
+          <a:bodyPr/>
+          <a:lstStyle/>
+          <a:p>
+            <a:r>
+              <a:rPr lang="en-US" dirty="0"/>
+              <a:t>Exam Weights</a:t>
+            </a:r>
+          </a:p>
+        </p:txBody>
+      </p:sp>
+      <p:pic>
+        <p:nvPicPr>
+          <p:cNvPr id="5" name="Content Placeholder 4">
+            <a:extLst>
+              <a:ext uri="{FF2B5EF4-FFF2-40B4-BE49-F238E27FC236}">
+                <a16:creationId xmlns:a16="http://schemas.microsoft.com/office/drawing/2014/main" id="{1F033B54-1230-F637-F16C-001E65C35961}"/>
+              </a:ext>
+            </a:extLst>
+          </p:cNvPr>
+          <p:cNvPicPr>
+            <a:picLocks noGrp="1" noChangeAspect="1"/>
+          </p:cNvPicPr>
+          <p:nvPr>
+            <p:ph idx="1"/>
+          </p:nvPr>
+        </p:nvPicPr>
+        <p:blipFill>
+          <a:blip r:embed="rId2"/>
+          <a:stretch>
+            <a:fillRect/>
+          </a:stretch>
+        </p:blipFill>
+        <p:spPr>
+          <a:xfrm>
+            <a:off x="1675783" y="2329420"/>
+            <a:ext cx="8840434" cy="3381847"/>
+          </a:xfrm>
+          <a:prstGeom prst="rect">
+            <a:avLst/>
+          </a:prstGeom>
+        </p:spPr>
+      </p:pic>
+    </p:spTree>
+    <p:extLst>
+      <p:ext uri="{BB962C8B-B14F-4D97-AF65-F5344CB8AC3E}">
+        <p14:creationId xmlns:p14="http://schemas.microsoft.com/office/powerpoint/2010/main" val="1699305335"/>
+      </p:ext>
+    </p:extLst>
+  </p:cSld>
+  <p:clrMapOvr>
+    <a:masterClrMapping/>
+  </p:clrMapOvr>
+</p:sld>
+</file>
+
+<file path=ppt/slides/slide4.xml><?xml version="1.0" encoding="utf-8"?>
+<p:sld xmlns:a="http://schemas.openxmlformats.org/drawingml/2006/main" xmlns:r="http://schemas.openxmlformats.org/officeDocument/2006/relationships" xmlns:p="http://schemas.openxmlformats.org/presentationml/2006/main">
+  <p:cSld>
+    <p:spTree>
+      <p:nvGrpSpPr>
+        <p:cNvPr id="1" name=""/>
+        <p:cNvGrpSpPr/>
+        <p:nvPr/>
+      </p:nvGrpSpPr>
+      <p:grpSpPr>
+        <a:xfrm>
+          <a:off x="0" y="0"/>
+          <a:ext cx="0" cy="0"/>
+          <a:chOff x="0" y="0"/>
+          <a:chExt cx="0" cy="0"/>
+        </a:xfrm>
+      </p:grpSpPr>
+      <p:sp>
+        <p:nvSpPr>
+          <p:cNvPr id="2" name="Title 1">
+            <a:extLst>
+              <a:ext uri="{FF2B5EF4-FFF2-40B4-BE49-F238E27FC236}">
+                <a16:creationId xmlns:a16="http://schemas.microsoft.com/office/drawing/2014/main" id="{5AC01033-D5A3-1CAE-D25B-F5890FA3EEB0}"/>
+              </a:ext>
+            </a:extLst>
+          </p:cNvPr>
+          <p:cNvSpPr>
+            <a:spLocks noGrp="1"/>
+          </p:cNvSpPr>
+          <p:nvPr>
+            <p:ph type="title"/>
+          </p:nvPr>
+        </p:nvSpPr>
+        <p:spPr/>
+        <p:txBody>
+          <a:bodyPr/>
+          <a:lstStyle/>
+          <a:p>
+            <a:r>
+              <a:rPr lang="en-US" dirty="0"/>
+              <a:t>Exam details</a:t>
+            </a:r>
+          </a:p>
+        </p:txBody>
+      </p:sp>
+      <p:sp>
+        <p:nvSpPr>
+          <p:cNvPr id="3" name="Content Placeholder 2">
+            <a:extLst>
+              <a:ext uri="{FF2B5EF4-FFF2-40B4-BE49-F238E27FC236}">
+                <a16:creationId xmlns:a16="http://schemas.microsoft.com/office/drawing/2014/main" id="{67186DEC-BCA2-7318-7F94-E2169D3682CF}"/>
+              </a:ext>
+            </a:extLst>
+          </p:cNvPr>
+          <p:cNvSpPr>
+            <a:spLocks noGrp="1"/>
+          </p:cNvSpPr>
+          <p:nvPr>
+            <p:ph idx="1"/>
+          </p:nvPr>
+        </p:nvSpPr>
+        <p:spPr/>
+        <p:txBody>
+          <a:bodyPr/>
+          <a:lstStyle/>
+          <a:p>
+            <a:r>
+              <a:rPr lang="en-US" dirty="0"/>
+              <a:t>Not required for our training </a:t>
+            </a:r>
+          </a:p>
+          <a:p>
+            <a:r>
+              <a:rPr lang="en-US" dirty="0"/>
+              <a:t>$175</a:t>
+            </a:r>
+          </a:p>
+          <a:p>
+            <a:r>
+              <a:rPr lang="en-US" dirty="0"/>
+              <a:t>100 questions </a:t>
+            </a:r>
+          </a:p>
+          <a:p>
+            <a:r>
+              <a:rPr lang="en-US" dirty="0"/>
+              <a:t>115 minutes </a:t>
+            </a:r>
+          </a:p>
+          <a:p>
+            <a:r>
+              <a:rPr lang="en-US" dirty="0"/>
+              <a:t>That’s about 1 minutes 9 seconds per question</a:t>
+            </a:r>
+          </a:p>
+          <a:p>
+            <a:r>
+              <a:rPr lang="en-US" dirty="0"/>
+              <a:t>Multiple choice</a:t>
+            </a:r>
+          </a:p>
+          <a:p>
+            <a:r>
+              <a:rPr lang="en-US" dirty="0"/>
+              <a:t>75% is passing – use the question flagging feature </a:t>
+            </a:r>
+          </a:p>
+        </p:txBody>
+      </p:sp>
+    </p:spTree>
+    <p:extLst>
+      <p:ext uri="{BB962C8B-B14F-4D97-AF65-F5344CB8AC3E}">
+        <p14:creationId xmlns:p14="http://schemas.microsoft.com/office/powerpoint/2010/main" val="912292336"/>
+      </p:ext>
+    </p:extLst>
+  </p:cSld>
+  <p:clrMapOvr>
+    <a:masterClrMapping/>
+  </p:clrMapOvr>
+</p:sld>
+</file>
+
+<file path=ppt/slides/slide5.xml><?xml version="1.0" encoding="utf-8"?>
+<p:sld xmlns:a="http://schemas.openxmlformats.org/drawingml/2006/main" xmlns:r="http://schemas.openxmlformats.org/officeDocument/2006/relationships" xmlns:p="http://schemas.openxmlformats.org/presentationml/2006/main">
+  <p:cSld>
+    <p:spTree>
+      <p:nvGrpSpPr>
+        <p:cNvPr id="1" name=""/>
+        <p:cNvGrpSpPr/>
+        <p:nvPr/>
+      </p:nvGrpSpPr>
+      <p:grpSpPr>
+        <a:xfrm>
+          <a:off x="0" y="0"/>
+          <a:ext cx="0" cy="0"/>
+          <a:chOff x="0" y="0"/>
+          <a:chExt cx="0" cy="0"/>
+        </a:xfrm>
+      </p:grpSpPr>
+      <p:sp>
+        <p:nvSpPr>
+          <p:cNvPr id="2" name="Title 1">
+            <a:extLst>
+              <a:ext uri="{FF2B5EF4-FFF2-40B4-BE49-F238E27FC236}">
+                <a16:creationId xmlns:a16="http://schemas.microsoft.com/office/drawing/2014/main" id="{017380F6-F002-799C-1072-2D3B859C66A0}"/>
+              </a:ext>
+            </a:extLst>
+          </p:cNvPr>
+          <p:cNvSpPr>
+            <a:spLocks noGrp="1"/>
+          </p:cNvSpPr>
+          <p:nvPr>
+            <p:ph type="title"/>
+          </p:nvPr>
+        </p:nvSpPr>
+        <p:spPr/>
+        <p:txBody>
+          <a:bodyPr/>
+          <a:lstStyle/>
+          <a:p>
+            <a:r>
+              <a:rPr lang="en-US" dirty="0"/>
+              <a:t>Cert exam tips (for any technical cert exam)</a:t>
+            </a:r>
+          </a:p>
+        </p:txBody>
+      </p:sp>
+      <p:sp>
+        <p:nvSpPr>
+          <p:cNvPr id="3" name="Content Placeholder 2">
+            <a:extLst>
+              <a:ext uri="{FF2B5EF4-FFF2-40B4-BE49-F238E27FC236}">
+                <a16:creationId xmlns:a16="http://schemas.microsoft.com/office/drawing/2014/main" id="{C3F0BB53-B3B0-245E-B5F7-11A423742B59}"/>
+              </a:ext>
+            </a:extLst>
+          </p:cNvPr>
+          <p:cNvSpPr>
+            <a:spLocks noGrp="1"/>
+          </p:cNvSpPr>
+          <p:nvPr>
+            <p:ph idx="1"/>
+          </p:nvPr>
+        </p:nvSpPr>
+        <p:spPr>
+          <a:xfrm>
+            <a:off x="581192" y="2180496"/>
+            <a:ext cx="11029615" cy="4284099"/>
+          </a:xfrm>
+        </p:spPr>
+        <p:txBody>
+          <a:bodyPr>
+            <a:normAutofit/>
+          </a:bodyPr>
+          <a:lstStyle/>
+          <a:p>
+            <a:r>
+              <a:rPr lang="en-US" b="1" dirty="0"/>
+              <a:t>Use the 60-second rule.</a:t>
+            </a:r>
+            <a:r>
+              <a:rPr lang="en-US" dirty="0"/>
+              <a:t> If you don't have a strong idea after about a minute, eliminate what you can, choose your best answer, flag it, and move on. Spending 3–4 minutes on one question is usually a net loss. </a:t>
+            </a:r>
+          </a:p>
+          <a:p>
+            <a:r>
+              <a:rPr lang="en-US" b="1" dirty="0"/>
+              <a:t>Answer every question.</a:t>
+            </a:r>
+            <a:r>
+              <a:rPr lang="en-US" dirty="0"/>
+              <a:t> There's typically no penalty for incorrect answers on certification exams, so never leave one blank. </a:t>
+            </a:r>
+          </a:p>
+          <a:p>
+            <a:r>
+              <a:rPr lang="en-US" b="1" dirty="0"/>
+              <a:t>Eliminate before choosing.</a:t>
+            </a:r>
+            <a:r>
+              <a:rPr lang="en-US" dirty="0"/>
+              <a:t> Often you can remove two clearly incorrect options, improving your odds from 25% to 50%. </a:t>
+            </a:r>
+          </a:p>
+          <a:p>
+            <a:r>
+              <a:rPr lang="en-US" b="1" dirty="0"/>
+              <a:t>Don't overthink familiar topics.</a:t>
+            </a:r>
+            <a:r>
+              <a:rPr lang="en-US" dirty="0"/>
+              <a:t> Your first instinct is often correct when you recognize the concept. Only change an answer during review if you can identify a concrete reason it was wrong. </a:t>
+            </a:r>
+          </a:p>
+          <a:p>
+            <a:r>
+              <a:rPr lang="en-US" b="1" dirty="0"/>
+              <a:t>Keep an eye on the clock every 20–25 questions.</a:t>
+            </a:r>
+            <a:r>
+              <a:rPr lang="en-US" dirty="0"/>
+              <a:t> Small adjustments are much easier than realizing you're 15 minutes behind near the end.</a:t>
+            </a:r>
+          </a:p>
+        </p:txBody>
+      </p:sp>
+    </p:spTree>
+    <p:extLst>
+      <p:ext uri="{BB962C8B-B14F-4D97-AF65-F5344CB8AC3E}">
+        <p14:creationId xmlns:p14="http://schemas.microsoft.com/office/powerpoint/2010/main" val="1515050680"/>
+      </p:ext>
+    </p:extLst>
+  </p:cSld>
+  <p:clrMapOvr>
+    <a:masterClrMapping/>
+  </p:clrMapOvr>
+</p:sld>
+</file>
+
+<file path=ppt/slides/slide6.xml><?xml version="1.0" encoding="utf-8"?>
+<p:sld xmlns:a="http://schemas.openxmlformats.org/drawingml/2006/main" xmlns:r="http://schemas.openxmlformats.org/officeDocument/2006/relationships" xmlns:p="http://schemas.openxmlformats.org/presentationml/2006/main">
+  <p:cSld>
+    <p:spTree>
+      <p:nvGrpSpPr>
+        <p:cNvPr id="1" name=""/>
+        <p:cNvGrpSpPr/>
+        <p:nvPr/>
+      </p:nvGrpSpPr>
+      <p:grpSpPr>
+        <a:xfrm>
+          <a:off x="0" y="0"/>
+          <a:ext cx="0" cy="0"/>
+          <a:chOff x="0" y="0"/>
+          <a:chExt cx="0" cy="0"/>
+        </a:xfrm>
+      </p:grpSpPr>
+      <p:sp>
+        <p:nvSpPr>
+          <p:cNvPr id="2" name="Title 1">
+            <a:extLst>
+              <a:ext uri="{FF2B5EF4-FFF2-40B4-BE49-F238E27FC236}">
+                <a16:creationId xmlns:a16="http://schemas.microsoft.com/office/drawing/2014/main" id="{B50C7C46-F45C-EDA6-B4C9-3DBE8D8D1397}"/>
+              </a:ext>
+            </a:extLst>
+          </p:cNvPr>
+          <p:cNvSpPr>
+            <a:spLocks noGrp="1"/>
+          </p:cNvSpPr>
+          <p:nvPr>
+            <p:ph type="title"/>
+          </p:nvPr>
+        </p:nvSpPr>
+        <p:spPr/>
+        <p:txBody>
+          <a:bodyPr/>
+          <a:lstStyle/>
+          <a:p>
+            <a:r>
+              <a:rPr lang="en-US" dirty="0"/>
+              <a:t>Trial Signup</a:t>
+            </a:r>
+          </a:p>
+        </p:txBody>
+      </p:sp>
+      <p:pic>
+        <p:nvPicPr>
+          <p:cNvPr id="5" name="Content Placeholder 4">
+            <a:extLst>
+              <a:ext uri="{FF2B5EF4-FFF2-40B4-BE49-F238E27FC236}">
+                <a16:creationId xmlns:a16="http://schemas.microsoft.com/office/drawing/2014/main" id="{F3C1622E-FA17-106D-7527-65352D28FB54}"/>
+              </a:ext>
+            </a:extLst>
+          </p:cNvPr>
+          <p:cNvPicPr>
+            <a:picLocks noGrp="1" noChangeAspect="1"/>
+          </p:cNvPicPr>
+          <p:nvPr>
+            <p:ph idx="1"/>
+          </p:nvPr>
+        </p:nvPicPr>
+        <p:blipFill>
+          <a:blip r:embed="rId2"/>
+          <a:stretch>
+            <a:fillRect/>
+          </a:stretch>
+        </p:blipFill>
+        <p:spPr>
+          <a:xfrm>
+            <a:off x="954973" y="2151417"/>
+            <a:ext cx="6220693" cy="1552792"/>
+          </a:xfrm>
+          <a:prstGeom prst="rect">
+            <a:avLst/>
+          </a:prstGeom>
+        </p:spPr>
+      </p:pic>
+      <p:pic>
+        <p:nvPicPr>
+          <p:cNvPr id="7" name="Picture 6">
+            <a:extLst>
+              <a:ext uri="{FF2B5EF4-FFF2-40B4-BE49-F238E27FC236}">
+                <a16:creationId xmlns:a16="http://schemas.microsoft.com/office/drawing/2014/main" id="{7FBED7FA-2C01-0349-166A-D3CA363498B4}"/>
+              </a:ext>
+            </a:extLst>
+          </p:cNvPr>
+          <p:cNvPicPr>
+            <a:picLocks noChangeAspect="1"/>
+          </p:cNvPicPr>
+          <p:nvPr/>
+        </p:nvPicPr>
+        <p:blipFill>
+          <a:blip r:embed="rId3"/>
+          <a:stretch>
+            <a:fillRect/>
+          </a:stretch>
+        </p:blipFill>
+        <p:spPr>
+          <a:xfrm>
+            <a:off x="7778338" y="2297639"/>
+            <a:ext cx="3104544" cy="4287227"/>
+          </a:xfrm>
+          <a:prstGeom prst="rect">
+            <a:avLst/>
+          </a:prstGeom>
+        </p:spPr>
+      </p:pic>
+      <p:sp>
+        <p:nvSpPr>
+          <p:cNvPr id="8" name="TextBox 7">
+            <a:extLst>
+              <a:ext uri="{FF2B5EF4-FFF2-40B4-BE49-F238E27FC236}">
+                <a16:creationId xmlns:a16="http://schemas.microsoft.com/office/drawing/2014/main" id="{F2D6BD50-1719-0B2E-F0F7-C1A1F9D55011}"/>
+              </a:ext>
+            </a:extLst>
+          </p:cNvPr>
+          <p:cNvSpPr txBox="1"/>
+          <p:nvPr/>
+        </p:nvSpPr>
+        <p:spPr>
+          <a:xfrm>
+            <a:off x="635630" y="4524499"/>
+            <a:ext cx="6859378" cy="923330"/>
+          </a:xfrm>
+          <a:prstGeom prst="rect">
+            <a:avLst/>
+          </a:prstGeom>
+          <a:noFill/>
+        </p:spPr>
+        <p:txBody>
+          <a:bodyPr wrap="none" rtlCol="0">
+            <a:spAutoFit/>
+          </a:bodyPr>
+          <a:lstStyle/>
+          <a:p>
+            <a:r>
+              <a:rPr lang="en-US" dirty="0"/>
+              <a:t>Signup for the 30-day trial</a:t>
+            </a:r>
+          </a:p>
+          <a:p>
+            <a:pPr marL="285750" indent="-285750">
+              <a:buFontTx/>
+              <a:buChar char="-"/>
+            </a:pPr>
+            <a:r>
+              <a:rPr lang="en-US" dirty="0"/>
+              <a:t>We will get $400 in free credits</a:t>
+            </a:r>
+          </a:p>
+          <a:p>
+            <a:pPr marL="285750" indent="-285750">
+              <a:buFontTx/>
+              <a:buChar char="-"/>
+            </a:pPr>
+            <a:r>
+              <a:rPr lang="en-US" dirty="0"/>
+              <a:t>Click the link they send to your email to create our first user, Admin</a:t>
+            </a:r>
+          </a:p>
+        </p:txBody>
+      </p:sp>
+    </p:spTree>
+    <p:extLst>
+      <p:ext uri="{BB962C8B-B14F-4D97-AF65-F5344CB8AC3E}">
+        <p14:creationId xmlns:p14="http://schemas.microsoft.com/office/powerpoint/2010/main" val="2154447691"/>
+      </p:ext>
+    </p:extLst>
+  </p:cSld>
+  <p:clrMapOvr>
+    <a:masterClrMapping/>
+  </p:clrMapOvr>
+</p:sld>
+</file>
+
+<file path=ppt/slides/slide7.xml><?xml version="1.0" encoding="utf-8"?>
+<p:sld xmlns:a="http://schemas.openxmlformats.org/drawingml/2006/main" xmlns:r="http://schemas.openxmlformats.org/officeDocument/2006/relationships" xmlns:p="http://schemas.openxmlformats.org/presentationml/2006/main">
+  <p:cSld>
+    <p:spTree>
+      <p:nvGrpSpPr>
+        <p:cNvPr id="1" name=""/>
+        <p:cNvGrpSpPr/>
+        <p:nvPr/>
+      </p:nvGrpSpPr>
+      <p:grpSpPr>
+        <a:xfrm>
+          <a:off x="0" y="0"/>
+          <a:ext cx="0" cy="0"/>
+          <a:chOff x="0" y="0"/>
+          <a:chExt cx="0" cy="0"/>
+        </a:xfrm>
+      </p:grpSpPr>
+      <p:sp>
+        <p:nvSpPr>
+          <p:cNvPr id="2" name="Title 1">
+            <a:extLst>
+              <a:ext uri="{FF2B5EF4-FFF2-40B4-BE49-F238E27FC236}">
+                <a16:creationId xmlns:a16="http://schemas.microsoft.com/office/drawing/2014/main" id="{0C5370DE-8130-C287-3342-6B6CBAF1568F}"/>
+              </a:ext>
+            </a:extLst>
+          </p:cNvPr>
+          <p:cNvSpPr>
+            <a:spLocks noGrp="1"/>
+          </p:cNvSpPr>
+          <p:nvPr>
+            <p:ph type="title"/>
+          </p:nvPr>
+        </p:nvSpPr>
+        <p:spPr/>
+        <p:txBody>
+          <a:bodyPr/>
+          <a:lstStyle/>
+          <a:p>
+            <a:r>
+              <a:rPr lang="en-US" dirty="0"/>
+              <a:t>Take note of your account number &amp; Account Identifier</a:t>
+            </a:r>
+          </a:p>
+        </p:txBody>
+      </p:sp>
+      <p:sp>
+        <p:nvSpPr>
+          <p:cNvPr id="3" name="Content Placeholder 2">
+            <a:extLst>
+              <a:ext uri="{FF2B5EF4-FFF2-40B4-BE49-F238E27FC236}">
+                <a16:creationId xmlns:a16="http://schemas.microsoft.com/office/drawing/2014/main" id="{FE218197-BA8C-F0BE-7A31-1CA6713C0954}"/>
+              </a:ext>
+            </a:extLst>
+          </p:cNvPr>
+          <p:cNvSpPr>
+            <a:spLocks noGrp="1"/>
+          </p:cNvSpPr>
+          <p:nvPr>
+            <p:ph idx="1"/>
+          </p:nvPr>
+        </p:nvSpPr>
+        <p:spPr>
+          <a:xfrm>
+            <a:off x="581193" y="2180496"/>
+            <a:ext cx="4596450" cy="1453353"/>
+          </a:xfrm>
+        </p:spPr>
+        <p:txBody>
+          <a:bodyPr>
+            <a:normAutofit/>
+          </a:bodyPr>
+          <a:lstStyle/>
+          <a:p>
+            <a:r>
+              <a:rPr lang="en-US" dirty="0"/>
+              <a:t>Account Number in </a:t>
+            </a:r>
+            <a:r>
+              <a:rPr lang="en-US" dirty="0" err="1"/>
+              <a:t>Snowsight</a:t>
+            </a:r>
+            <a:r>
+              <a:rPr lang="en-US" dirty="0"/>
+              <a:t> UI – used for billing, etc. </a:t>
+            </a:r>
+          </a:p>
+          <a:p>
+            <a:r>
+              <a:rPr lang="en-US" dirty="0"/>
+              <a:t>Account Identifier (used to login, and many other things) </a:t>
+            </a:r>
+          </a:p>
+        </p:txBody>
+      </p:sp>
+      <p:pic>
+        <p:nvPicPr>
+          <p:cNvPr id="5" name="Picture 4">
+            <a:extLst>
+              <a:ext uri="{FF2B5EF4-FFF2-40B4-BE49-F238E27FC236}">
+                <a16:creationId xmlns:a16="http://schemas.microsoft.com/office/drawing/2014/main" id="{315E82BA-9A75-86BD-A3F6-2F43919D7E3F}"/>
+              </a:ext>
+            </a:extLst>
+          </p:cNvPr>
+          <p:cNvPicPr>
+            <a:picLocks noChangeAspect="1"/>
+          </p:cNvPicPr>
+          <p:nvPr/>
+        </p:nvPicPr>
+        <p:blipFill>
+          <a:blip r:embed="rId2"/>
+          <a:stretch>
+            <a:fillRect/>
+          </a:stretch>
+        </p:blipFill>
+        <p:spPr>
+          <a:xfrm>
+            <a:off x="6400800" y="2091430"/>
+            <a:ext cx="4433304" cy="4588439"/>
+          </a:xfrm>
+          <a:prstGeom prst="rect">
+            <a:avLst/>
+          </a:prstGeom>
+        </p:spPr>
+      </p:pic>
+      <p:pic>
+        <p:nvPicPr>
+          <p:cNvPr id="9" name="Picture 8">
+            <a:extLst>
+              <a:ext uri="{FF2B5EF4-FFF2-40B4-BE49-F238E27FC236}">
+                <a16:creationId xmlns:a16="http://schemas.microsoft.com/office/drawing/2014/main" id="{FDC10965-CFC8-A2C6-24EF-4641A8B7EE7B}"/>
+              </a:ext>
+            </a:extLst>
+          </p:cNvPr>
+          <p:cNvPicPr>
+            <a:picLocks noChangeAspect="1"/>
+          </p:cNvPicPr>
+          <p:nvPr/>
+        </p:nvPicPr>
+        <p:blipFill>
+          <a:blip r:embed="rId3"/>
+          <a:stretch>
+            <a:fillRect/>
+          </a:stretch>
+        </p:blipFill>
+        <p:spPr>
+          <a:xfrm>
+            <a:off x="438688" y="4591638"/>
+            <a:ext cx="6535062" cy="428685"/>
+          </a:xfrm>
+          <a:prstGeom prst="rect">
+            <a:avLst/>
+          </a:prstGeom>
+        </p:spPr>
+      </p:pic>
+    </p:spTree>
+    <p:extLst>
+      <p:ext uri="{BB962C8B-B14F-4D97-AF65-F5344CB8AC3E}">
+        <p14:creationId xmlns:p14="http://schemas.microsoft.com/office/powerpoint/2010/main" val="3995486203"/>
+      </p:ext>
+    </p:extLst>
+  </p:cSld>
+  <p:clrMapOvr>
+    <a:masterClrMapping/>
+  </p:clrMapOvr>
+</p:sld>
+</file>
+
+<file path=ppt/slides/slide8.xml><?xml version="1.0" encoding="utf-8"?>
+<p:sld xmlns:a="http://schemas.openxmlformats.org/drawingml/2006/main" xmlns:r="http://schemas.openxmlformats.org/officeDocument/2006/relationships" xmlns:p="http://schemas.openxmlformats.org/presentationml/2006/main">
+  <p:cSld>
+    <p:spTree>
+      <p:nvGrpSpPr>
+        <p:cNvPr id="1" name=""/>
+        <p:cNvGrpSpPr/>
+        <p:nvPr/>
+      </p:nvGrpSpPr>
+      <p:grpSpPr>
+        <a:xfrm>
+          <a:off x="0" y="0"/>
+          <a:ext cx="0" cy="0"/>
+          <a:chOff x="0" y="0"/>
+          <a:chExt cx="0" cy="0"/>
+        </a:xfrm>
+      </p:grpSpPr>
+      <p:sp>
+        <p:nvSpPr>
+          <p:cNvPr id="2" name="Title 1">
+            <a:extLst>
+              <a:ext uri="{FF2B5EF4-FFF2-40B4-BE49-F238E27FC236}">
+                <a16:creationId xmlns:a16="http://schemas.microsoft.com/office/drawing/2014/main" id="{6D6E357D-C455-17D9-76B7-57CE75F43CE6}"/>
+              </a:ext>
+            </a:extLst>
+          </p:cNvPr>
+          <p:cNvSpPr>
+            <a:spLocks noGrp="1"/>
+          </p:cNvSpPr>
+          <p:nvPr>
+            <p:ph type="title"/>
+          </p:nvPr>
+        </p:nvSpPr>
+        <p:spPr/>
+        <p:txBody>
+          <a:bodyPr/>
+          <a:lstStyle/>
+          <a:p>
+            <a:r>
+              <a:rPr lang="en-US" dirty="0"/>
+              <a:t>UI - Workspaces</a:t>
+            </a:r>
+          </a:p>
+        </p:txBody>
+      </p:sp>
+      <p:pic>
+        <p:nvPicPr>
+          <p:cNvPr id="5" name="Content Placeholder 4">
+            <a:extLst>
+              <a:ext uri="{FF2B5EF4-FFF2-40B4-BE49-F238E27FC236}">
+                <a16:creationId xmlns:a16="http://schemas.microsoft.com/office/drawing/2014/main" id="{24178760-51D5-5599-C7F8-7AD92D3B0522}"/>
+              </a:ext>
+            </a:extLst>
+          </p:cNvPr>
+          <p:cNvPicPr>
+            <a:picLocks noGrp="1" noChangeAspect="1"/>
+          </p:cNvPicPr>
+          <p:nvPr>
+            <p:ph idx="1"/>
+          </p:nvPr>
+        </p:nvPicPr>
+        <p:blipFill>
+          <a:blip r:embed="rId2"/>
+          <a:stretch>
+            <a:fillRect/>
+          </a:stretch>
+        </p:blipFill>
+        <p:spPr>
+          <a:xfrm>
+            <a:off x="2539875" y="3528781"/>
+            <a:ext cx="7368417" cy="3211379"/>
+          </a:xfrm>
+          <a:prstGeom prst="rect">
+            <a:avLst/>
+          </a:prstGeom>
+        </p:spPr>
+      </p:pic>
+      <p:sp>
+        <p:nvSpPr>
+          <p:cNvPr id="7" name="TextBox 6">
+            <a:extLst>
+              <a:ext uri="{FF2B5EF4-FFF2-40B4-BE49-F238E27FC236}">
+                <a16:creationId xmlns:a16="http://schemas.microsoft.com/office/drawing/2014/main" id="{754A2E45-48A0-DCA6-10D5-411E0718FE65}"/>
+              </a:ext>
+            </a:extLst>
+          </p:cNvPr>
+          <p:cNvSpPr txBox="1"/>
+          <p:nvPr/>
+        </p:nvSpPr>
+        <p:spPr>
+          <a:xfrm>
+            <a:off x="922475" y="1951672"/>
+            <a:ext cx="10603215" cy="1477328"/>
+          </a:xfrm>
+          <a:prstGeom prst="rect">
+            <a:avLst/>
+          </a:prstGeom>
+          <a:noFill/>
+        </p:spPr>
+        <p:txBody>
+          <a:bodyPr wrap="square">
+            <a:spAutoFit/>
+          </a:bodyPr>
+          <a:lstStyle/>
+          <a:p>
+            <a:pPr marL="285750" indent="-285750">
+              <a:buClr>
+                <a:schemeClr val="accent2"/>
+              </a:buClr>
+              <a:buFont typeface="Wingdings" panose="05000000000000000000" pitchFamily="2" charset="2"/>
+              <a:buChar char="§"/>
+            </a:pPr>
+            <a:r>
+              <a:rPr lang="en-US" dirty="0"/>
+              <a:t>A workspace is an environment within the </a:t>
+            </a:r>
+            <a:r>
+              <a:rPr lang="en-US" dirty="0" err="1"/>
+              <a:t>Snowsight</a:t>
+            </a:r>
+            <a:r>
+              <a:rPr lang="en-US" dirty="0"/>
+              <a:t> user interface that organizes and stores development and analytical assets—such as SQL worksheets, notebooks, and dashboards.</a:t>
+            </a:r>
+          </a:p>
+          <a:p>
+            <a:pPr marL="285750" indent="-285750">
+              <a:buClr>
+                <a:schemeClr val="accent2"/>
+              </a:buClr>
+              <a:buFont typeface="Wingdings" panose="05000000000000000000" pitchFamily="2" charset="2"/>
+              <a:buChar char="§"/>
+            </a:pPr>
+            <a:r>
+              <a:rPr lang="en-US" dirty="0"/>
+              <a:t>Workspaces enable users to manage, access, and collaborate on these assets independently of the underlying Snowflake data objects (databases, schemas, and warehouses). </a:t>
+            </a:r>
+          </a:p>
+          <a:p>
+            <a:pPr marL="285750" indent="-285750">
+              <a:buClr>
+                <a:schemeClr val="accent2"/>
+              </a:buClr>
+              <a:buFont typeface="Wingdings" panose="05000000000000000000" pitchFamily="2" charset="2"/>
+              <a:buChar char="§"/>
+            </a:pPr>
+            <a:r>
+              <a:rPr lang="en-US" dirty="0"/>
+              <a:t>Workspaces can be private or shared.</a:t>
+            </a:r>
+          </a:p>
+        </p:txBody>
+      </p:sp>
+    </p:spTree>
+    <p:extLst>
+      <p:ext uri="{BB962C8B-B14F-4D97-AF65-F5344CB8AC3E}">
+        <p14:creationId xmlns:p14="http://schemas.microsoft.com/office/powerpoint/2010/main" val="874723205"/>
+      </p:ext>
+    </p:extLst>
+  </p:cSld>
+  <p:clrMapOvr>
+    <a:masterClrMapping/>
+  </p:clrMapOvr>
+</p:sld>
+</file>
+
+<file path=ppt/slides/slide9.xml><?xml version="1.0" encoding="utf-8"?>
+<p:sld xmlns:a="http://schemas.openxmlformats.org/drawingml/2006/main" xmlns:r="http://schemas.openxmlformats.org/officeDocument/2006/relationships" xmlns:p="http://schemas.openxmlformats.org/presentationml/2006/main">
+  <p:cSld>
+    <p:spTree>
+      <p:nvGrpSpPr>
+        <p:cNvPr id="1" name=""/>
+        <p:cNvGrpSpPr/>
+        <p:nvPr/>
+      </p:nvGrpSpPr>
+      <p:grpSpPr>
+        <a:xfrm>
+          <a:off x="0" y="0"/>
+          <a:ext cx="0" cy="0"/>
+          <a:chOff x="0" y="0"/>
+          <a:chExt cx="0" cy="0"/>
+        </a:xfrm>
+      </p:grpSpPr>
+      <p:sp>
+        <p:nvSpPr>
+          <p:cNvPr id="2" name="Title 1">
+            <a:extLst>
+              <a:ext uri="{FF2B5EF4-FFF2-40B4-BE49-F238E27FC236}">
+                <a16:creationId xmlns:a16="http://schemas.microsoft.com/office/drawing/2014/main" id="{DECB9DA3-1C95-C4CD-4BCA-848B5CF71ED4}"/>
+              </a:ext>
+            </a:extLst>
+          </p:cNvPr>
+          <p:cNvSpPr>
+            <a:spLocks noGrp="1"/>
+          </p:cNvSpPr>
+          <p:nvPr>
+            <p:ph type="title"/>
+          </p:nvPr>
+        </p:nvSpPr>
+        <p:spPr/>
+        <p:txBody>
+          <a:bodyPr/>
+          <a:lstStyle/>
+          <a:p>
+            <a:r>
+              <a:rPr lang="en-US" dirty="0"/>
+              <a:t>Data Warehouse vs Data lake</a:t>
+            </a:r>
+          </a:p>
+        </p:txBody>
+      </p:sp>
+      <p:graphicFrame>
+        <p:nvGraphicFramePr>
+          <p:cNvPr id="4" name="Content Placeholder 3">
+            <a:extLst>
+              <a:ext uri="{FF2B5EF4-FFF2-40B4-BE49-F238E27FC236}">
+                <a16:creationId xmlns:a16="http://schemas.microsoft.com/office/drawing/2014/main" id="{8D110107-A6C9-32F7-76D8-5EFF4372BDD4}"/>
+              </a:ext>
+            </a:extLst>
+          </p:cNvPr>
+          <p:cNvGraphicFramePr>
+            <a:graphicFrameLocks noGrp="1"/>
+          </p:cNvGraphicFramePr>
+          <p:nvPr>
+            <p:ph idx="1"/>
+            <p:extLst>
+              <p:ext uri="{D42A27DB-BD31-4B8C-83A1-F6EECF244321}">
+                <p14:modId xmlns:p14="http://schemas.microsoft.com/office/powerpoint/2010/main" val="3699033662"/>
+              </p:ext>
+            </p:extLst>
+          </p:nvPr>
+        </p:nvGraphicFramePr>
+        <p:xfrm>
+          <a:off x="2134504" y="2291409"/>
+          <a:ext cx="7922991" cy="3695376"/>
+        </p:xfrm>
+        <a:graphic>
+          <a:graphicData uri="http://schemas.openxmlformats.org/drawingml/2006/table">
+            <a:tbl>
+              <a:tblPr/>
+              <a:tblGrid>
+                <a:gridCol w="2640997">
+                  <a:extLst>
+                    <a:ext uri="{9D8B030D-6E8A-4147-A177-3AD203B41FA5}">
+                      <a16:colId xmlns:a16="http://schemas.microsoft.com/office/drawing/2014/main" val="3855626703"/>
+                    </a:ext>
+                  </a:extLst>
+                </a:gridCol>
+                <a:gridCol w="2640997">
+                  <a:extLst>
+                    <a:ext uri="{9D8B030D-6E8A-4147-A177-3AD203B41FA5}">
+                      <a16:colId xmlns:a16="http://schemas.microsoft.com/office/drawing/2014/main" val="1455984046"/>
+                    </a:ext>
+                  </a:extLst>
+                </a:gridCol>
+                <a:gridCol w="2640997">
+                  <a:extLst>
+                    <a:ext uri="{9D8B030D-6E8A-4147-A177-3AD203B41FA5}">
+                      <a16:colId xmlns:a16="http://schemas.microsoft.com/office/drawing/2014/main" val="2804569480"/>
+                    </a:ext>
+                  </a:extLst>
+                </a:gridCol>
+              </a:tblGrid>
+              <a:tr h="262731">
+                <a:tc>
+                  <a:txBody>
+                    <a:bodyPr/>
+                    <a:lstStyle/>
+                    <a:p>
+                      <a:pPr>
+                        <a:buNone/>
+                      </a:pPr>
+                      <a:r>
+                        <a:rPr lang="en-US" sz="1300"/>
+                        <a:t>Feature</a:t>
+                      </a:r>
+                    </a:p>
+                  </a:txBody>
+                  <a:tcPr marL="65683" marR="65683" marT="32841" marB="32841" anchor="ctr">
+                    <a:lnL>
+                      <a:noFill/>
+                    </a:lnL>
+                    <a:lnR>
+                      <a:noFill/>
+                    </a:lnR>
+                    <a:lnT>
+                      <a:noFill/>
+                    </a:lnT>
+                    <a:lnB>
+                      <a:noFill/>
+                    </a:lnB>
+                    <a:noFill/>
+                  </a:tcPr>
+                </a:tc>
+                <a:tc>
+                  <a:txBody>
+                    <a:bodyPr/>
+                    <a:lstStyle/>
+                    <a:p>
+                      <a:pPr>
+                        <a:buNone/>
+                      </a:pPr>
+                      <a:r>
+                        <a:rPr lang="en-US" sz="1300"/>
+                        <a:t>Data Warehouse</a:t>
+                      </a:r>
+                    </a:p>
+                  </a:txBody>
+                  <a:tcPr marL="65683" marR="65683" marT="32841" marB="32841" anchor="ctr">
+                    <a:lnL>
+                      <a:noFill/>
+                    </a:lnL>
+                    <a:lnR>
+                      <a:noFill/>
+                    </a:lnR>
+                    <a:lnT>
+                      <a:noFill/>
+                    </a:lnT>
+                    <a:lnB>
+                      <a:noFill/>
+                    </a:lnB>
+                    <a:noFill/>
+                  </a:tcPr>
+                </a:tc>
+                <a:tc>
+                  <a:txBody>
+                    <a:bodyPr/>
+                    <a:lstStyle/>
+                    <a:p>
+                      <a:pPr>
+                        <a:buNone/>
+                      </a:pPr>
+                      <a:r>
+                        <a:rPr lang="en-US" sz="1300"/>
+                        <a:t>Data Lake</a:t>
+                      </a:r>
+                    </a:p>
+                  </a:txBody>
+                  <a:tcPr marL="65683" marR="65683" marT="32841" marB="32841" anchor="ctr">
+                    <a:lnL>
+                      <a:noFill/>
+                    </a:lnL>
+                    <a:lnR>
+                      <a:noFill/>
+                    </a:lnR>
+                    <a:lnT>
+                      <a:noFill/>
+                    </a:lnT>
+                    <a:lnB>
+                      <a:noFill/>
+                    </a:lnB>
+                    <a:noFill/>
+                  </a:tcPr>
+                </a:tc>
+                <a:extLst>
+                  <a:ext uri="{0D108BD9-81ED-4DB2-BD59-A6C34878D82A}">
+                    <a16:rowId xmlns:a16="http://schemas.microsoft.com/office/drawing/2014/main" val="2487513938"/>
+                  </a:ext>
+                </a:extLst>
+              </a:tr>
+              <a:tr h="459780">
+                <a:tc>
+                  <a:txBody>
+                    <a:bodyPr/>
+                    <a:lstStyle/>
+                    <a:p>
+                      <a:pPr>
+                        <a:buNone/>
+                      </a:pPr>
+                      <a:r>
+                        <a:rPr lang="en-US" sz="1300" b="1"/>
+                        <a:t>Purpose</a:t>
+                      </a:r>
+                      <a:endParaRPr lang="en-US" sz="1300"/>
+                    </a:p>
+                  </a:txBody>
+                  <a:tcPr marL="65683" marR="65683" marT="32841" marB="32841" anchor="ctr">
+                    <a:lnL>
+                      <a:noFill/>
+                    </a:lnL>
+                    <a:lnR>
+                      <a:noFill/>
+                    </a:lnR>
+                    <a:lnT>
+                      <a:noFill/>
+                    </a:lnT>
+                    <a:lnB>
+                      <a:noFill/>
+                    </a:lnB>
+                    <a:noFill/>
+                  </a:tcPr>
+                </a:tc>
+                <a:tc>
+                  <a:txBody>
+                    <a:bodyPr/>
+                    <a:lstStyle/>
+                    <a:p>
+                      <a:pPr>
+                        <a:buNone/>
+                      </a:pPr>
+                      <a:r>
+                        <a:rPr lang="en-US" sz="1300"/>
+                        <a:t>Supports business reporting and analytics</a:t>
+                      </a:r>
+                    </a:p>
+                  </a:txBody>
+                  <a:tcPr marL="65683" marR="65683" marT="32841" marB="32841" anchor="ctr">
+                    <a:lnL>
+                      <a:noFill/>
+                    </a:lnL>
+                    <a:lnR>
+                      <a:noFill/>
+                    </a:lnR>
+                    <a:lnT>
+                      <a:noFill/>
+                    </a:lnT>
+                    <a:lnB>
+                      <a:noFill/>
+                    </a:lnB>
+                    <a:noFill/>
+                  </a:tcPr>
+                </a:tc>
+                <a:tc>
+                  <a:txBody>
+                    <a:bodyPr/>
+                    <a:lstStyle/>
+                    <a:p>
+                      <a:pPr>
+                        <a:buNone/>
+                      </a:pPr>
+                      <a:r>
+                        <a:rPr lang="en-US" sz="1300"/>
+                        <a:t>Stores large amounts of raw data for various uses</a:t>
+                      </a:r>
+                    </a:p>
+                  </a:txBody>
+                  <a:tcPr marL="65683" marR="65683" marT="32841" marB="32841" anchor="ctr">
+                    <a:lnL>
+                      <a:noFill/>
+                    </a:lnL>
+                    <a:lnR>
+                      <a:noFill/>
+                    </a:lnR>
+                    <a:lnT>
+                      <a:noFill/>
+                    </a:lnT>
+                    <a:lnB>
+                      <a:noFill/>
+                    </a:lnB>
+                    <a:noFill/>
+                  </a:tcPr>
+                </a:tc>
+                <a:extLst>
+                  <a:ext uri="{0D108BD9-81ED-4DB2-BD59-A6C34878D82A}">
+                    <a16:rowId xmlns:a16="http://schemas.microsoft.com/office/drawing/2014/main" val="2014709851"/>
+                  </a:ext>
+                </a:extLst>
+              </a:tr>
+              <a:tr h="459780">
+                <a:tc>
+                  <a:txBody>
+                    <a:bodyPr/>
+                    <a:lstStyle/>
+                    <a:p>
+                      <a:pPr>
+                        <a:buNone/>
+                      </a:pPr>
+                      <a:r>
+                        <a:rPr lang="en-US" sz="1300" b="1"/>
+                        <a:t>Data Type</a:t>
+                      </a:r>
+                      <a:endParaRPr lang="en-US" sz="1300"/>
+                    </a:p>
+                  </a:txBody>
+                  <a:tcPr marL="65683" marR="65683" marT="32841" marB="32841" anchor="ctr">
+                    <a:lnL>
+                      <a:noFill/>
+                    </a:lnL>
+                    <a:lnR>
+                      <a:noFill/>
+                    </a:lnR>
+                    <a:lnT>
+                      <a:noFill/>
+                    </a:lnT>
+                    <a:lnB>
+                      <a:noFill/>
+                    </a:lnB>
+                    <a:noFill/>
+                  </a:tcPr>
+                </a:tc>
+                <a:tc>
+                  <a:txBody>
+                    <a:bodyPr/>
+                    <a:lstStyle/>
+                    <a:p>
+                      <a:pPr>
+                        <a:buNone/>
+                      </a:pPr>
+                      <a:r>
+                        <a:rPr lang="en-US" sz="1300"/>
+                        <a:t>Primarily structured data (tables, rows, columns)</a:t>
+                      </a:r>
+                    </a:p>
+                  </a:txBody>
+                  <a:tcPr marL="65683" marR="65683" marT="32841" marB="32841" anchor="ctr">
+                    <a:lnL>
+                      <a:noFill/>
+                    </a:lnL>
+                    <a:lnR>
+                      <a:noFill/>
+                    </a:lnR>
+                    <a:lnT>
+                      <a:noFill/>
+                    </a:lnT>
+                    <a:lnB>
+                      <a:noFill/>
+                    </a:lnB>
+                    <a:noFill/>
+                  </a:tcPr>
+                </a:tc>
+                <a:tc>
+                  <a:txBody>
+                    <a:bodyPr/>
+                    <a:lstStyle/>
+                    <a:p>
+                      <a:pPr>
+                        <a:buNone/>
+                      </a:pPr>
+                      <a:r>
+                        <a:rPr lang="en-US" sz="1300"/>
+                        <a:t>Structured, semi-structured, and unstructured data</a:t>
+                      </a:r>
+                    </a:p>
+                  </a:txBody>
+                  <a:tcPr marL="65683" marR="65683" marT="32841" marB="32841" anchor="ctr">
+                    <a:lnL>
+                      <a:noFill/>
+                    </a:lnL>
+                    <a:lnR>
+                      <a:noFill/>
+                    </a:lnR>
+                    <a:lnT>
+                      <a:noFill/>
+                    </a:lnT>
+                    <a:lnB>
+                      <a:noFill/>
+                    </a:lnB>
+                    <a:noFill/>
+                  </a:tcPr>
+                </a:tc>
+                <a:extLst>
+                  <a:ext uri="{0D108BD9-81ED-4DB2-BD59-A6C34878D82A}">
+                    <a16:rowId xmlns:a16="http://schemas.microsoft.com/office/drawing/2014/main" val="2861249007"/>
+                  </a:ext>
+                </a:extLst>
+              </a:tr>
+              <a:tr h="656828">
+                <a:tc>
+                  <a:txBody>
+                    <a:bodyPr/>
+                    <a:lstStyle/>
+                    <a:p>
+                      <a:pPr>
+                        <a:buNone/>
+                      </a:pPr>
+                      <a:r>
+                        <a:rPr lang="en-US" sz="1300" b="1"/>
+                        <a:t>Data Processing</a:t>
+                      </a:r>
+                      <a:endParaRPr lang="en-US" sz="1300"/>
+                    </a:p>
+                  </a:txBody>
+                  <a:tcPr marL="65683" marR="65683" marT="32841" marB="32841" anchor="ctr">
+                    <a:lnL>
+                      <a:noFill/>
+                    </a:lnL>
+                    <a:lnR>
+                      <a:noFill/>
+                    </a:lnR>
+                    <a:lnT>
+                      <a:noFill/>
+                    </a:lnT>
+                    <a:lnB>
+                      <a:noFill/>
+                    </a:lnB>
+                    <a:noFill/>
+                  </a:tcPr>
+                </a:tc>
+                <a:tc>
+                  <a:txBody>
+                    <a:bodyPr/>
+                    <a:lstStyle/>
+                    <a:p>
+                      <a:pPr>
+                        <a:buNone/>
+                      </a:pPr>
+                      <a:r>
+                        <a:rPr lang="en-US" sz="1300"/>
+                        <a:t>Data is cleaned and transformed before loading ("schema-on-write")</a:t>
+                      </a:r>
+                    </a:p>
+                  </a:txBody>
+                  <a:tcPr marL="65683" marR="65683" marT="32841" marB="32841" anchor="ctr">
+                    <a:lnL>
+                      <a:noFill/>
+                    </a:lnL>
+                    <a:lnR>
+                      <a:noFill/>
+                    </a:lnR>
+                    <a:lnT>
+                      <a:noFill/>
+                    </a:lnT>
+                    <a:lnB>
+                      <a:noFill/>
+                    </a:lnB>
+                    <a:noFill/>
+                  </a:tcPr>
+                </a:tc>
+                <a:tc>
+                  <a:txBody>
+                    <a:bodyPr/>
+                    <a:lstStyle/>
+                    <a:p>
+                      <a:pPr>
+                        <a:buNone/>
+                      </a:pPr>
+                      <a:r>
+                        <a:rPr lang="en-US" sz="1300"/>
+                        <a:t>Data is stored in its raw form and structured when read ("schema-on-read")</a:t>
+                      </a:r>
+                    </a:p>
+                  </a:txBody>
+                  <a:tcPr marL="65683" marR="65683" marT="32841" marB="32841" anchor="ctr">
+                    <a:lnL>
+                      <a:noFill/>
+                    </a:lnL>
+                    <a:lnR>
+                      <a:noFill/>
+                    </a:lnR>
+                    <a:lnT>
+                      <a:noFill/>
+                    </a:lnT>
+                    <a:lnB>
+                      <a:noFill/>
+                    </a:lnB>
+                    <a:noFill/>
+                  </a:tcPr>
+                </a:tc>
+                <a:extLst>
+                  <a:ext uri="{0D108BD9-81ED-4DB2-BD59-A6C34878D82A}">
+                    <a16:rowId xmlns:a16="http://schemas.microsoft.com/office/drawing/2014/main" val="3822401944"/>
+                  </a:ext>
+                </a:extLst>
+              </a:tr>
+              <a:tr h="459780">
+                <a:tc>
+                  <a:txBody>
+                    <a:bodyPr/>
+                    <a:lstStyle/>
+                    <a:p>
+                      <a:pPr>
+                        <a:buNone/>
+                      </a:pPr>
+                      <a:r>
+                        <a:rPr lang="en-US" sz="1300" b="1"/>
+                        <a:t>Users</a:t>
+                      </a:r>
+                      <a:endParaRPr lang="en-US" sz="1300"/>
+                    </a:p>
+                  </a:txBody>
+                  <a:tcPr marL="65683" marR="65683" marT="32841" marB="32841" anchor="ctr">
+                    <a:lnL>
+                      <a:noFill/>
+                    </a:lnL>
+                    <a:lnR>
+                      <a:noFill/>
+                    </a:lnR>
+                    <a:lnT>
+                      <a:noFill/>
+                    </a:lnT>
+                    <a:lnB>
+                      <a:noFill/>
+                    </a:lnB>
+                    <a:noFill/>
+                  </a:tcPr>
+                </a:tc>
+                <a:tc>
+                  <a:txBody>
+                    <a:bodyPr/>
+                    <a:lstStyle/>
+                    <a:p>
+                      <a:pPr>
+                        <a:buNone/>
+                      </a:pPr>
+                      <a:r>
+                        <a:rPr lang="en-US" sz="1300"/>
+                        <a:t>Business analysts, executives, BI teams</a:t>
+                      </a:r>
+                    </a:p>
+                  </a:txBody>
+                  <a:tcPr marL="65683" marR="65683" marT="32841" marB="32841" anchor="ctr">
+                    <a:lnL>
+                      <a:noFill/>
+                    </a:lnL>
+                    <a:lnR>
+                      <a:noFill/>
+                    </a:lnR>
+                    <a:lnT>
+                      <a:noFill/>
+                    </a:lnT>
+                    <a:lnB>
+                      <a:noFill/>
+                    </a:lnB>
+                    <a:noFill/>
+                  </a:tcPr>
+                </a:tc>
+                <a:tc>
+                  <a:txBody>
+                    <a:bodyPr/>
+                    <a:lstStyle/>
+                    <a:p>
+                      <a:pPr>
+                        <a:buNone/>
+                      </a:pPr>
+                      <a:r>
+                        <a:rPr lang="en-US" sz="1300"/>
+                        <a:t>Data scientists, data engineers, ML engineers, analysts</a:t>
+                      </a:r>
+                    </a:p>
+                  </a:txBody>
+                  <a:tcPr marL="65683" marR="65683" marT="32841" marB="32841" anchor="ctr">
+                    <a:lnL>
+                      <a:noFill/>
+                    </a:lnL>
+                    <a:lnR>
+                      <a:noFill/>
+                    </a:lnR>
+                    <a:lnT>
+                      <a:noFill/>
+                    </a:lnT>
+                    <a:lnB>
+                      <a:noFill/>
+                    </a:lnB>
+                    <a:noFill/>
+                  </a:tcPr>
+                </a:tc>
+                <a:extLst>
+                  <a:ext uri="{0D108BD9-81ED-4DB2-BD59-A6C34878D82A}">
+                    <a16:rowId xmlns:a16="http://schemas.microsoft.com/office/drawing/2014/main" val="2491275722"/>
+                  </a:ext>
+                </a:extLst>
+              </a:tr>
+              <a:tr h="459780">
+                <a:tc>
+                  <a:txBody>
+                    <a:bodyPr/>
+                    <a:lstStyle/>
+                    <a:p>
+                      <a:pPr>
+                        <a:buNone/>
+                      </a:pPr>
+                      <a:r>
+                        <a:rPr lang="en-US" sz="1300" b="1"/>
+                        <a:t>Performance</a:t>
+                      </a:r>
+                      <a:endParaRPr lang="en-US" sz="1300"/>
+                    </a:p>
+                  </a:txBody>
+                  <a:tcPr marL="65683" marR="65683" marT="32841" marB="32841" anchor="ctr">
+                    <a:lnL>
+                      <a:noFill/>
+                    </a:lnL>
+                    <a:lnR>
+                      <a:noFill/>
+                    </a:lnR>
+                    <a:lnT>
+                      <a:noFill/>
+                    </a:lnT>
+                    <a:lnB>
+                      <a:noFill/>
+                    </a:lnB>
+                    <a:noFill/>
+                  </a:tcPr>
+                </a:tc>
+                <a:tc>
+                  <a:txBody>
+                    <a:bodyPr/>
+                    <a:lstStyle/>
+                    <a:p>
+                      <a:pPr>
+                        <a:buNone/>
+                      </a:pPr>
+                      <a:r>
+                        <a:rPr lang="en-US" sz="1300"/>
+                        <a:t>Optimized for fast SQL queries and dashboards</a:t>
+                      </a:r>
+                    </a:p>
+                  </a:txBody>
+                  <a:tcPr marL="65683" marR="65683" marT="32841" marB="32841" anchor="ctr">
+                    <a:lnL>
+                      <a:noFill/>
+                    </a:lnL>
+                    <a:lnR>
+                      <a:noFill/>
+                    </a:lnR>
+                    <a:lnT>
+                      <a:noFill/>
+                    </a:lnT>
+                    <a:lnB>
+                      <a:noFill/>
+                    </a:lnB>
+                    <a:noFill/>
+                  </a:tcPr>
+                </a:tc>
+                <a:tc>
+                  <a:txBody>
+                    <a:bodyPr/>
+                    <a:lstStyle/>
+                    <a:p>
+                      <a:pPr>
+                        <a:buNone/>
+                      </a:pPr>
+                      <a:r>
+                        <a:rPr lang="en-US" sz="1300"/>
+                        <a:t>Optimized for scalable storage and advanced analytics</a:t>
+                      </a:r>
+                    </a:p>
+                  </a:txBody>
+                  <a:tcPr marL="65683" marR="65683" marT="32841" marB="32841" anchor="ctr">
+                    <a:lnL>
+                      <a:noFill/>
+                    </a:lnL>
+                    <a:lnR>
+                      <a:noFill/>
+                    </a:lnR>
+                    <a:lnT>
+                      <a:noFill/>
+                    </a:lnT>
+                    <a:lnB>
+                      <a:noFill/>
+                    </a:lnB>
+                    <a:noFill/>
+                  </a:tcPr>
+                </a:tc>
+                <a:extLst>
+                  <a:ext uri="{0D108BD9-81ED-4DB2-BD59-A6C34878D82A}">
+                    <a16:rowId xmlns:a16="http://schemas.microsoft.com/office/drawing/2014/main" val="4156254637"/>
+                  </a:ext>
+                </a:extLst>
+              </a:tr>
+              <a:tr h="459780">
+                <a:tc>
+                  <a:txBody>
+                    <a:bodyPr/>
+                    <a:lstStyle/>
+                    <a:p>
+                      <a:pPr>
+                        <a:buNone/>
+                      </a:pPr>
+                      <a:r>
+                        <a:rPr lang="en-US" sz="1300" b="1"/>
+                        <a:t>Storage Cost</a:t>
+                      </a:r>
+                      <a:endParaRPr lang="en-US" sz="1300"/>
+                    </a:p>
+                  </a:txBody>
+                  <a:tcPr marL="65683" marR="65683" marT="32841" marB="32841" anchor="ctr">
+                    <a:lnL>
+                      <a:noFill/>
+                    </a:lnL>
+                    <a:lnR>
+                      <a:noFill/>
+                    </a:lnR>
+                    <a:lnT>
+                      <a:noFill/>
+                    </a:lnT>
+                    <a:lnB>
+                      <a:noFill/>
+                    </a:lnB>
+                    <a:noFill/>
+                  </a:tcPr>
+                </a:tc>
+                <a:tc>
+                  <a:txBody>
+                    <a:bodyPr/>
+                    <a:lstStyle/>
+                    <a:p>
+                      <a:pPr>
+                        <a:buNone/>
+                      </a:pPr>
+                      <a:r>
+                        <a:rPr lang="en-US" sz="1300"/>
+                        <a:t>Typically higher</a:t>
+                      </a:r>
+                    </a:p>
+                  </a:txBody>
+                  <a:tcPr marL="65683" marR="65683" marT="32841" marB="32841" anchor="ctr">
+                    <a:lnL>
+                      <a:noFill/>
+                    </a:lnL>
+                    <a:lnR>
+                      <a:noFill/>
+                    </a:lnR>
+                    <a:lnT>
+                      <a:noFill/>
+                    </a:lnT>
+                    <a:lnB>
+                      <a:noFill/>
+                    </a:lnB>
+                    <a:noFill/>
+                  </a:tcPr>
+                </a:tc>
+                <a:tc>
+                  <a:txBody>
+                    <a:bodyPr/>
+                    <a:lstStyle/>
+                    <a:p>
+                      <a:pPr>
+                        <a:buNone/>
+                      </a:pPr>
+                      <a:r>
+                        <a:rPr lang="en-US" sz="1300"/>
+                        <a:t>Typically lower because it uses inexpensive object storage</a:t>
+                      </a:r>
+                    </a:p>
+                  </a:txBody>
+                  <a:tcPr marL="65683" marR="65683" marT="32841" marB="32841" anchor="ctr">
+                    <a:lnL>
+                      <a:noFill/>
+                    </a:lnL>
+                    <a:lnR>
+                      <a:noFill/>
+                    </a:lnR>
+                    <a:lnT>
+                      <a:noFill/>
+                    </a:lnT>
+                    <a:lnB>
+                      <a:noFill/>
+                    </a:lnB>
+                    <a:noFill/>
+                  </a:tcPr>
+                </a:tc>
+                <a:extLst>
+                  <a:ext uri="{0D108BD9-81ED-4DB2-BD59-A6C34878D82A}">
+                    <a16:rowId xmlns:a16="http://schemas.microsoft.com/office/drawing/2014/main" val="2508989479"/>
+                  </a:ext>
+                </a:extLst>
+              </a:tr>
+              <a:tr h="459780">
+                <a:tc>
+                  <a:txBody>
+                    <a:bodyPr/>
+                    <a:lstStyle/>
+                    <a:p>
+                      <a:pPr>
+                        <a:buNone/>
+                      </a:pPr>
+                      <a:r>
+                        <a:rPr lang="en-US" sz="1300" b="1"/>
+                        <a:t>Examples</a:t>
+                      </a:r>
+                      <a:endParaRPr lang="en-US" sz="1300"/>
+                    </a:p>
+                  </a:txBody>
+                  <a:tcPr marL="65683" marR="65683" marT="32841" marB="32841" anchor="ctr">
+                    <a:lnL>
+                      <a:noFill/>
+                    </a:lnL>
+                    <a:lnR>
+                      <a:noFill/>
+                    </a:lnR>
+                    <a:lnT>
+                      <a:noFill/>
+                    </a:lnT>
+                    <a:lnB>
+                      <a:noFill/>
+                    </a:lnB>
+                    <a:noFill/>
+                  </a:tcPr>
+                </a:tc>
+                <a:tc>
+                  <a:txBody>
+                    <a:bodyPr/>
+                    <a:lstStyle/>
+                    <a:p>
+                      <a:pPr>
+                        <a:buNone/>
+                      </a:pPr>
+                      <a:r>
+                        <a:rPr lang="en-US" sz="1300"/>
+                        <a:t>Financial reporting, sales dashboards, KPI tracking</a:t>
+                      </a:r>
+                    </a:p>
+                  </a:txBody>
+                  <a:tcPr marL="65683" marR="65683" marT="32841" marB="32841" anchor="ctr">
+                    <a:lnL>
+                      <a:noFill/>
+                    </a:lnL>
+                    <a:lnR>
+                      <a:noFill/>
+                    </a:lnR>
+                    <a:lnT>
+                      <a:noFill/>
+                    </a:lnT>
+                    <a:lnB>
+                      <a:noFill/>
+                    </a:lnB>
+                    <a:noFill/>
+                  </a:tcPr>
+                </a:tc>
+                <a:tc>
+                  <a:txBody>
+                    <a:bodyPr/>
+                    <a:lstStyle/>
+                    <a:p>
+                      <a:pPr>
+                        <a:buNone/>
+                      </a:pPr>
+                      <a:r>
+                        <a:rPr lang="en-US" sz="1300" dirty="0"/>
+                        <a:t>Machine learning, log analysis, IoT data, clickstream analysis</a:t>
+                      </a:r>
+                    </a:p>
+                  </a:txBody>
+                  <a:tcPr marL="65683" marR="65683" marT="32841" marB="32841" anchor="ctr">
+                    <a:lnL>
+                      <a:noFill/>
+                    </a:lnL>
+                    <a:lnR>
+                      <a:noFill/>
+                    </a:lnR>
+                    <a:lnT>
+                      <a:noFill/>
+                    </a:lnT>
+                    <a:lnB>
+                      <a:noFill/>
+                    </a:lnB>
+                    <a:noFill/>
+                  </a:tcPr>
+                </a:tc>
+                <a:extLst>
+                  <a:ext uri="{0D108BD9-81ED-4DB2-BD59-A6C34878D82A}">
+                    <a16:rowId xmlns:a16="http://schemas.microsoft.com/office/drawing/2014/main" val="785403280"/>
+                  </a:ext>
+                </a:extLst>
+              </a:tr>
+            </a:tbl>
+          </a:graphicData>
+        </a:graphic>
+      </p:graphicFrame>
+    </p:spTree>
+    <p:extLst>
+      <p:ext uri="{BB962C8B-B14F-4D97-AF65-F5344CB8AC3E}">
+        <p14:creationId xmlns:p14="http://schemas.microsoft.com/office/powerpoint/2010/main" val="3148461460"/>
       </p:ext>
     </p:extLst>
   </p:cSld>
